--- a/training/English (en)/Refinement and Publication Training [R&P]/01 Intro to Refinement WT and Slides/Refinement Workshop Intro WT slides.pptx
+++ b/training/English (en)/Refinement and Publication Training [R&P]/01 Intro to Refinement WT and Slides/Refinement Workshop Intro WT slides.pptx
@@ -148,9 +148,420 @@
 <file path=ppt/revisionInfo.xml><?xml version="1.0" encoding="utf-8"?>
 <p1510:revInfo xmlns:a="http://schemas.openxmlformats.org/drawingml/2006/main" xmlns:r="http://schemas.openxmlformats.org/officeDocument/2006/relationships" xmlns:p1510="http://schemas.microsoft.com/office/powerpoint/2015/10/main">
   <p1510:revLst>
-    <p1510:client id="{AB0D3872-0559-3140-BC2F-63A3CCBC5E6E}" v="158" dt="2024-12-10T15:13:49.412"/>
+    <p1510:client id="{33BB704F-3E2C-FC54-966C-05B646644591}" v="225" dt="2026-05-06T18:27:24.250"/>
   </p1510:revLst>
 </p1510:revInfo>
+</file>
+
+<file path=ppt/changesInfos/changesInfo1.xml><?xml version="1.0" encoding="utf-8"?>
+<pc:chgInfo xmlns:a="http://schemas.openxmlformats.org/drawingml/2006/main" xmlns:r="http://schemas.openxmlformats.org/officeDocument/2006/relationships" xmlns:ac="http://schemas.microsoft.com/office/drawing/2013/main/command" xmlns:pc="http://schemas.microsoft.com/office/powerpoint/2013/main/command">
+  <pc:docChgLst>
+    <pc:chgData name="Deborah Shaw" userId="S::deborah_shaw@wycliffeassociates.org::79bf7848-a030-4096-934a-3abbfde4984a" providerId="AD" clId="Web-{33BB704F-3E2C-FC54-966C-05B646644591}"/>
+    <pc:docChg chg="modSld">
+      <pc:chgData name="Deborah Shaw" userId="S::deborah_shaw@wycliffeassociates.org::79bf7848-a030-4096-934a-3abbfde4984a" providerId="AD" clId="Web-{33BB704F-3E2C-FC54-966C-05B646644591}" dt="2026-05-06T18:27:24.250" v="119" actId="1076"/>
+      <pc:docMkLst>
+        <pc:docMk/>
+      </pc:docMkLst>
+      <pc:sldChg chg="addSp modSp addAnim">
+        <pc:chgData name="Deborah Shaw" userId="S::deborah_shaw@wycliffeassociates.org::79bf7848-a030-4096-934a-3abbfde4984a" providerId="AD" clId="Web-{33BB704F-3E2C-FC54-966C-05B646644591}" dt="2026-05-06T18:27:24.250" v="119" actId="1076"/>
+        <pc:sldMkLst>
+          <pc:docMk/>
+          <pc:sldMk cId="2899712388" sldId="258"/>
+        </pc:sldMkLst>
+        <pc:spChg chg="mod">
+          <ac:chgData name="Deborah Shaw" userId="S::deborah_shaw@wycliffeassociates.org::79bf7848-a030-4096-934a-3abbfde4984a" providerId="AD" clId="Web-{33BB704F-3E2C-FC54-966C-05B646644591}" dt="2026-05-06T18:27:17.484" v="118" actId="1076"/>
+          <ac:spMkLst>
+            <pc:docMk/>
+            <pc:sldMk cId="2899712388" sldId="258"/>
+            <ac:spMk id="8" creationId="{364DAD44-2863-DCB9-9C3A-A9A14D1729B5}"/>
+          </ac:spMkLst>
+        </pc:spChg>
+        <pc:spChg chg="mod">
+          <ac:chgData name="Deborah Shaw" userId="S::deborah_shaw@wycliffeassociates.org::79bf7848-a030-4096-934a-3abbfde4984a" providerId="AD" clId="Web-{33BB704F-3E2C-FC54-966C-05B646644591}" dt="2026-05-06T18:26:52.031" v="115" actId="20577"/>
+          <ac:spMkLst>
+            <pc:docMk/>
+            <pc:sldMk cId="2899712388" sldId="258"/>
+            <ac:spMk id="13" creationId="{4E0F8449-863C-AD40-2FB3-69399181FEEF}"/>
+          </ac:spMkLst>
+        </pc:spChg>
+        <pc:spChg chg="mod">
+          <ac:chgData name="Deborah Shaw" userId="S::deborah_shaw@wycliffeassociates.org::79bf7848-a030-4096-934a-3abbfde4984a" providerId="AD" clId="Web-{33BB704F-3E2C-FC54-966C-05B646644591}" dt="2026-05-06T18:27:24.250" v="119" actId="1076"/>
+          <ac:spMkLst>
+            <pc:docMk/>
+            <pc:sldMk cId="2899712388" sldId="258"/>
+            <ac:spMk id="14" creationId="{4E055E44-79B9-EFBF-47BA-9302B5DCFBD6}"/>
+          </ac:spMkLst>
+        </pc:spChg>
+        <pc:spChg chg="add mod">
+          <ac:chgData name="Deborah Shaw" userId="S::deborah_shaw@wycliffeassociates.org::79bf7848-a030-4096-934a-3abbfde4984a" providerId="AD" clId="Web-{33BB704F-3E2C-FC54-966C-05B646644591}" dt="2026-05-06T18:27:13.453" v="117" actId="1076"/>
+          <ac:spMkLst>
+            <pc:docMk/>
+            <pc:sldMk cId="2899712388" sldId="258"/>
+            <ac:spMk id="17" creationId="{8C9C3E0C-359C-72FA-1D42-31AB0BF55E1D}"/>
+          </ac:spMkLst>
+        </pc:spChg>
+      </pc:sldChg>
+      <pc:sldChg chg="delSp modSp">
+        <pc:chgData name="Deborah Shaw" userId="S::deborah_shaw@wycliffeassociates.org::79bf7848-a030-4096-934a-3abbfde4984a" providerId="AD" clId="Web-{33BB704F-3E2C-FC54-966C-05B646644591}" dt="2026-05-06T18:24:39.093" v="36" actId="20577"/>
+        <pc:sldMkLst>
+          <pc:docMk/>
+          <pc:sldMk cId="3990504019" sldId="294"/>
+        </pc:sldMkLst>
+        <pc:spChg chg="mod">
+          <ac:chgData name="Deborah Shaw" userId="S::deborah_shaw@wycliffeassociates.org::79bf7848-a030-4096-934a-3abbfde4984a" providerId="AD" clId="Web-{33BB704F-3E2C-FC54-966C-05B646644591}" dt="2026-05-06T18:24:39.093" v="36" actId="20577"/>
+          <ac:spMkLst>
+            <pc:docMk/>
+            <pc:sldMk cId="3990504019" sldId="294"/>
+            <ac:spMk id="9" creationId="{8386E5E6-A716-2BEB-99D7-CF699BD1ECF3}"/>
+          </ac:spMkLst>
+        </pc:spChg>
+        <pc:spChg chg="del">
+          <ac:chgData name="Deborah Shaw" userId="S::deborah_shaw@wycliffeassociates.org::79bf7848-a030-4096-934a-3abbfde4984a" providerId="AD" clId="Web-{33BB704F-3E2C-FC54-966C-05B646644591}" dt="2026-05-06T18:23:30.233" v="3"/>
+          <ac:spMkLst>
+            <pc:docMk/>
+            <pc:sldMk cId="3990504019" sldId="294"/>
+            <ac:spMk id="27" creationId="{BA3912D5-7016-8975-B81B-A5E90825A640}"/>
+          </ac:spMkLst>
+        </pc:spChg>
+      </pc:sldChg>
+    </pc:docChg>
+  </pc:docChgLst>
+  <pc:docChgLst>
+    <pc:chgData name="Deborah Shaw" userId="79bf7848-a030-4096-934a-3abbfde4984a" providerId="ADAL" clId="{8DE9E9FB-001C-4B84-83DE-E1F7ABB9FAA3}"/>
+    <pc:docChg chg="undo custSel modSld">
+      <pc:chgData name="Deborah Shaw" userId="79bf7848-a030-4096-934a-3abbfde4984a" providerId="ADAL" clId="{8DE9E9FB-001C-4B84-83DE-E1F7ABB9FAA3}" dt="2026-05-06T19:51:46.018" v="50"/>
+      <pc:docMkLst>
+        <pc:docMk/>
+      </pc:docMkLst>
+      <pc:sldChg chg="modSp mod addAnim delAnim modAnim">
+        <pc:chgData name="Deborah Shaw" userId="79bf7848-a030-4096-934a-3abbfde4984a" providerId="ADAL" clId="{8DE9E9FB-001C-4B84-83DE-E1F7ABB9FAA3}" dt="2026-05-06T19:51:46.018" v="50"/>
+        <pc:sldMkLst>
+          <pc:docMk/>
+          <pc:sldMk cId="2899712388" sldId="258"/>
+        </pc:sldMkLst>
+        <pc:spChg chg="mod">
+          <ac:chgData name="Deborah Shaw" userId="79bf7848-a030-4096-934a-3abbfde4984a" providerId="ADAL" clId="{8DE9E9FB-001C-4B84-83DE-E1F7ABB9FAA3}" dt="2026-05-06T19:48:08.139" v="38" actId="1076"/>
+          <ac:spMkLst>
+            <pc:docMk/>
+            <pc:sldMk cId="2899712388" sldId="258"/>
+            <ac:spMk id="9" creationId="{C21ADA6B-088C-97AD-9A0C-3CE2F0DC9EC1}"/>
+          </ac:spMkLst>
+        </pc:spChg>
+        <pc:spChg chg="mod">
+          <ac:chgData name="Deborah Shaw" userId="79bf7848-a030-4096-934a-3abbfde4984a" providerId="ADAL" clId="{8DE9E9FB-001C-4B84-83DE-E1F7ABB9FAA3}" dt="2026-05-06T19:48:19.288" v="39" actId="1076"/>
+          <ac:spMkLst>
+            <pc:docMk/>
+            <pc:sldMk cId="2899712388" sldId="258"/>
+            <ac:spMk id="11" creationId="{7DADD327-A292-A313-D155-B94717E1FC1A}"/>
+          </ac:spMkLst>
+        </pc:spChg>
+        <pc:spChg chg="mod">
+          <ac:chgData name="Deborah Shaw" userId="79bf7848-a030-4096-934a-3abbfde4984a" providerId="ADAL" clId="{8DE9E9FB-001C-4B84-83DE-E1F7ABB9FAA3}" dt="2026-05-06T19:43:06.082" v="3" actId="20577"/>
+          <ac:spMkLst>
+            <pc:docMk/>
+            <pc:sldMk cId="2899712388" sldId="258"/>
+            <ac:spMk id="12" creationId="{E1F93830-5506-6137-241C-FFDC236B262A}"/>
+          </ac:spMkLst>
+        </pc:spChg>
+        <pc:spChg chg="mod">
+          <ac:chgData name="Deborah Shaw" userId="79bf7848-a030-4096-934a-3abbfde4984a" providerId="ADAL" clId="{8DE9E9FB-001C-4B84-83DE-E1F7ABB9FAA3}" dt="2026-05-06T19:51:18.755" v="45" actId="6549"/>
+          <ac:spMkLst>
+            <pc:docMk/>
+            <pc:sldMk cId="2899712388" sldId="258"/>
+            <ac:spMk id="13" creationId="{4E0F8449-863C-AD40-2FB3-69399181FEEF}"/>
+          </ac:spMkLst>
+        </pc:spChg>
+        <pc:spChg chg="mod">
+          <ac:chgData name="Deborah Shaw" userId="79bf7848-a030-4096-934a-3abbfde4984a" providerId="ADAL" clId="{8DE9E9FB-001C-4B84-83DE-E1F7ABB9FAA3}" dt="2026-05-06T19:48:04.175" v="37" actId="1076"/>
+          <ac:spMkLst>
+            <pc:docMk/>
+            <pc:sldMk cId="2899712388" sldId="258"/>
+            <ac:spMk id="17" creationId="{8C9C3E0C-359C-72FA-1D42-31AB0BF55E1D}"/>
+          </ac:spMkLst>
+        </pc:spChg>
+      </pc:sldChg>
+    </pc:docChg>
+  </pc:docChgLst>
+  <pc:docChgLst>
+    <pc:chgData name="Deborah Shaw" userId="S::deborah_shaw@wycliffeassociates.org::79bf7848-a030-4096-934a-3abbfde4984a" providerId="AD" clId="Web-{79DE71FB-C361-C4B9-36AD-B25771942E27}"/>
+    <pc:docChg chg="modSld">
+      <pc:chgData name="Deborah Shaw" userId="S::deborah_shaw@wycliffeassociates.org::79bf7848-a030-4096-934a-3abbfde4984a" providerId="AD" clId="Web-{79DE71FB-C361-C4B9-36AD-B25771942E27}" dt="2026-04-13T20:49:20.587" v="10" actId="1076"/>
+      <pc:docMkLst>
+        <pc:docMk/>
+      </pc:docMkLst>
+      <pc:sldChg chg="modSp">
+        <pc:chgData name="Deborah Shaw" userId="S::deborah_shaw@wycliffeassociates.org::79bf7848-a030-4096-934a-3abbfde4984a" providerId="AD" clId="Web-{79DE71FB-C361-C4B9-36AD-B25771942E27}" dt="2026-04-13T20:49:20.587" v="10" actId="1076"/>
+        <pc:sldMkLst>
+          <pc:docMk/>
+          <pc:sldMk cId="3604494224" sldId="287"/>
+        </pc:sldMkLst>
+        <pc:picChg chg="mod modCrop">
+          <ac:chgData name="Deborah Shaw" userId="S::deborah_shaw@wycliffeassociates.org::79bf7848-a030-4096-934a-3abbfde4984a" providerId="AD" clId="Web-{79DE71FB-C361-C4B9-36AD-B25771942E27}" dt="2026-04-13T20:49:20.587" v="10" actId="1076"/>
+          <ac:picMkLst>
+            <pc:docMk/>
+            <pc:sldMk cId="3604494224" sldId="287"/>
+            <ac:picMk id="2" creationId="{389F3353-587C-37FF-1E5F-DFAE44B9D6C1}"/>
+          </ac:picMkLst>
+        </pc:picChg>
+      </pc:sldChg>
+    </pc:docChg>
+  </pc:docChgLst>
+  <pc:docChgLst>
+    <pc:chgData name="Deborah Shaw" userId="S::deborah_shaw@wycliffeassociates.org::79bf7848-a030-4096-934a-3abbfde4984a" providerId="AD" clId="Web-{6DE10A40-EB8E-DF88-6D9A-2DB2DF8B275D}"/>
+    <pc:docChg chg="modSld">
+      <pc:chgData name="Deborah Shaw" userId="S::deborah_shaw@wycliffeassociates.org::79bf7848-a030-4096-934a-3abbfde4984a" providerId="AD" clId="Web-{6DE10A40-EB8E-DF88-6D9A-2DB2DF8B275D}" dt="2026-04-13T19:06:55.996" v="7" actId="1076"/>
+      <pc:docMkLst>
+        <pc:docMk/>
+      </pc:docMkLst>
+      <pc:sldChg chg="modSp">
+        <pc:chgData name="Deborah Shaw" userId="S::deborah_shaw@wycliffeassociates.org::79bf7848-a030-4096-934a-3abbfde4984a" providerId="AD" clId="Web-{6DE10A40-EB8E-DF88-6D9A-2DB2DF8B275D}" dt="2026-04-13T19:06:55.996" v="7" actId="1076"/>
+        <pc:sldMkLst>
+          <pc:docMk/>
+          <pc:sldMk cId="529853859" sldId="340"/>
+        </pc:sldMkLst>
+        <pc:spChg chg="mod">
+          <ac:chgData name="Deborah Shaw" userId="S::deborah_shaw@wycliffeassociates.org::79bf7848-a030-4096-934a-3abbfde4984a" providerId="AD" clId="Web-{6DE10A40-EB8E-DF88-6D9A-2DB2DF8B275D}" dt="2026-04-13T19:06:00.996" v="0" actId="14100"/>
+          <ac:spMkLst>
+            <pc:docMk/>
+            <pc:sldMk cId="529853859" sldId="340"/>
+            <ac:spMk id="10" creationId="{8CF0440F-614D-D3FB-AFEC-DD38A4E0E3F6}"/>
+          </ac:spMkLst>
+        </pc:spChg>
+        <pc:spChg chg="mod">
+          <ac:chgData name="Deborah Shaw" userId="S::deborah_shaw@wycliffeassociates.org::79bf7848-a030-4096-934a-3abbfde4984a" providerId="AD" clId="Web-{6DE10A40-EB8E-DF88-6D9A-2DB2DF8B275D}" dt="2026-04-13T19:06:30.965" v="1" actId="14100"/>
+          <ac:spMkLst>
+            <pc:docMk/>
+            <pc:sldMk cId="529853859" sldId="340"/>
+            <ac:spMk id="25" creationId="{E9C5BCA2-37A7-7DA7-BA3A-1FFB04FDF30C}"/>
+          </ac:spMkLst>
+        </pc:spChg>
+        <pc:spChg chg="mod">
+          <ac:chgData name="Deborah Shaw" userId="S::deborah_shaw@wycliffeassociates.org::79bf7848-a030-4096-934a-3abbfde4984a" providerId="AD" clId="Web-{6DE10A40-EB8E-DF88-6D9A-2DB2DF8B275D}" dt="2026-04-13T19:06:46.668" v="5" actId="1076"/>
+          <ac:spMkLst>
+            <pc:docMk/>
+            <pc:sldMk cId="529853859" sldId="340"/>
+            <ac:spMk id="28" creationId="{364623D6-3B23-2F38-9406-2F614755353D}"/>
+          </ac:spMkLst>
+        </pc:spChg>
+        <pc:picChg chg="mod">
+          <ac:chgData name="Deborah Shaw" userId="S::deborah_shaw@wycliffeassociates.org::79bf7848-a030-4096-934a-3abbfde4984a" providerId="AD" clId="Web-{6DE10A40-EB8E-DF88-6D9A-2DB2DF8B275D}" dt="2026-04-13T19:06:55.996" v="7" actId="1076"/>
+          <ac:picMkLst>
+            <pc:docMk/>
+            <pc:sldMk cId="529853859" sldId="340"/>
+            <ac:picMk id="1026" creationId="{55AE9C35-A387-5394-28A4-6237975BD5E5}"/>
+          </ac:picMkLst>
+        </pc:picChg>
+      </pc:sldChg>
+    </pc:docChg>
+  </pc:docChgLst>
+  <pc:docChgLst>
+    <pc:chgData name="Deborah Shaw" userId="S::deborah_shaw@wycliffeassociates.org::79bf7848-a030-4096-934a-3abbfde4984a" providerId="AD" clId="Web-{73BECC7A-143D-A6A3-4512-A337AF2E4F0C}"/>
+    <pc:docChg chg="modSld">
+      <pc:chgData name="Deborah Shaw" userId="S::deborah_shaw@wycliffeassociates.org::79bf7848-a030-4096-934a-3abbfde4984a" providerId="AD" clId="Web-{73BECC7A-143D-A6A3-4512-A337AF2E4F0C}" dt="2026-04-21T16:38:13.514" v="26"/>
+      <pc:docMkLst>
+        <pc:docMk/>
+      </pc:docMkLst>
+      <pc:sldChg chg="addSp delSp addAnim delAnim">
+        <pc:chgData name="Deborah Shaw" userId="S::deborah_shaw@wycliffeassociates.org::79bf7848-a030-4096-934a-3abbfde4984a" providerId="AD" clId="Web-{73BECC7A-143D-A6A3-4512-A337AF2E4F0C}" dt="2026-04-21T16:38:06.404" v="24"/>
+        <pc:sldMkLst>
+          <pc:docMk/>
+          <pc:sldMk cId="2899712388" sldId="258"/>
+        </pc:sldMkLst>
+      </pc:sldChg>
+      <pc:sldChg chg="addSp delSp modSp addAnim delAnim">
+        <pc:chgData name="Deborah Shaw" userId="S::deborah_shaw@wycliffeassociates.org::79bf7848-a030-4096-934a-3abbfde4984a" providerId="AD" clId="Web-{73BECC7A-143D-A6A3-4512-A337AF2E4F0C}" dt="2026-04-21T16:38:13.514" v="26"/>
+        <pc:sldMkLst>
+          <pc:docMk/>
+          <pc:sldMk cId="3990504019" sldId="294"/>
+        </pc:sldMkLst>
+      </pc:sldChg>
+    </pc:docChg>
+  </pc:docChgLst>
+  <pc:docChgLst>
+    <pc:chgData name="Deborah Shaw" userId="S::deborah_shaw@wycliffeassociates.org::79bf7848-a030-4096-934a-3abbfde4984a" providerId="AD" clId="Web-{29928380-7B1E-50AF-3C64-01669FBDDBFD}"/>
+    <pc:docChg chg="modSld">
+      <pc:chgData name="Deborah Shaw" userId="S::deborah_shaw@wycliffeassociates.org::79bf7848-a030-4096-934a-3abbfde4984a" providerId="AD" clId="Web-{29928380-7B1E-50AF-3C64-01669FBDDBFD}" dt="2026-04-13T19:05:16.092" v="9"/>
+      <pc:docMkLst>
+        <pc:docMk/>
+      </pc:docMkLst>
+      <pc:sldChg chg="delSp">
+        <pc:chgData name="Deborah Shaw" userId="S::deborah_shaw@wycliffeassociates.org::79bf7848-a030-4096-934a-3abbfde4984a" providerId="AD" clId="Web-{29928380-7B1E-50AF-3C64-01669FBDDBFD}" dt="2026-04-13T19:05:16.092" v="9"/>
+        <pc:sldMkLst>
+          <pc:docMk/>
+          <pc:sldMk cId="529853859" sldId="340"/>
+        </pc:sldMkLst>
+        <pc:spChg chg="topLvl">
+          <ac:chgData name="Deborah Shaw" userId="S::deborah_shaw@wycliffeassociates.org::79bf7848-a030-4096-934a-3abbfde4984a" providerId="AD" clId="Web-{29928380-7B1E-50AF-3C64-01669FBDDBFD}" dt="2026-04-13T19:04:44.389" v="3"/>
+          <ac:spMkLst>
+            <pc:docMk/>
+            <pc:sldMk cId="529853859" sldId="340"/>
+            <ac:spMk id="3" creationId="{5EB12F5E-3A14-948D-0FAF-D209E5FCE85C}"/>
+          </ac:spMkLst>
+        </pc:spChg>
+        <pc:spChg chg="topLvl">
+          <ac:chgData name="Deborah Shaw" userId="S::deborah_shaw@wycliffeassociates.org::79bf7848-a030-4096-934a-3abbfde4984a" providerId="AD" clId="Web-{29928380-7B1E-50AF-3C64-01669FBDDBFD}" dt="2026-04-13T19:04:47.264" v="4"/>
+          <ac:spMkLst>
+            <pc:docMk/>
+            <pc:sldMk cId="529853859" sldId="340"/>
+            <ac:spMk id="7" creationId="{D8529B26-DB5D-1721-E414-CB08421D59B8}"/>
+          </ac:spMkLst>
+        </pc:spChg>
+        <pc:spChg chg="topLvl">
+          <ac:chgData name="Deborah Shaw" userId="S::deborah_shaw@wycliffeassociates.org::79bf7848-a030-4096-934a-3abbfde4984a" providerId="AD" clId="Web-{29928380-7B1E-50AF-3C64-01669FBDDBFD}" dt="2026-04-13T19:04:41.858" v="2"/>
+          <ac:spMkLst>
+            <pc:docMk/>
+            <pc:sldMk cId="529853859" sldId="340"/>
+            <ac:spMk id="10" creationId="{8CF0440F-614D-D3FB-AFEC-DD38A4E0E3F6}"/>
+          </ac:spMkLst>
+        </pc:spChg>
+        <pc:spChg chg="topLvl">
+          <ac:chgData name="Deborah Shaw" userId="S::deborah_shaw@wycliffeassociates.org::79bf7848-a030-4096-934a-3abbfde4984a" providerId="AD" clId="Web-{29928380-7B1E-50AF-3C64-01669FBDDBFD}" dt="2026-04-13T19:04:49.499" v="5"/>
+          <ac:spMkLst>
+            <pc:docMk/>
+            <pc:sldMk cId="529853859" sldId="340"/>
+            <ac:spMk id="13" creationId="{4FFD54A4-FB92-B3AF-FAEB-A8DDFFEED2CE}"/>
+          </ac:spMkLst>
+        </pc:spChg>
+        <pc:spChg chg="topLvl">
+          <ac:chgData name="Deborah Shaw" userId="S::deborah_shaw@wycliffeassociates.org::79bf7848-a030-4096-934a-3abbfde4984a" providerId="AD" clId="Web-{29928380-7B1E-50AF-3C64-01669FBDDBFD}" dt="2026-04-13T19:04:38.889" v="1"/>
+          <ac:spMkLst>
+            <pc:docMk/>
+            <pc:sldMk cId="529853859" sldId="340"/>
+            <ac:spMk id="16" creationId="{8C21860A-1792-6C5A-1DF9-0C6B6E3DA4FB}"/>
+          </ac:spMkLst>
+        </pc:spChg>
+        <pc:spChg chg="topLvl">
+          <ac:chgData name="Deborah Shaw" userId="S::deborah_shaw@wycliffeassociates.org::79bf7848-a030-4096-934a-3abbfde4984a" providerId="AD" clId="Web-{29928380-7B1E-50AF-3C64-01669FBDDBFD}" dt="2026-04-13T19:04:55.280" v="6"/>
+          <ac:spMkLst>
+            <pc:docMk/>
+            <pc:sldMk cId="529853859" sldId="340"/>
+            <ac:spMk id="19" creationId="{8663576F-3D1F-CD84-828A-16FC6B7BC41C}"/>
+          </ac:spMkLst>
+        </pc:spChg>
+        <pc:spChg chg="topLvl">
+          <ac:chgData name="Deborah Shaw" userId="S::deborah_shaw@wycliffeassociates.org::79bf7848-a030-4096-934a-3abbfde4984a" providerId="AD" clId="Web-{29928380-7B1E-50AF-3C64-01669FBDDBFD}" dt="2026-04-13T19:04:59.045" v="7"/>
+          <ac:spMkLst>
+            <pc:docMk/>
+            <pc:sldMk cId="529853859" sldId="340"/>
+            <ac:spMk id="25" creationId="{E9C5BCA2-37A7-7DA7-BA3A-1FFB04FDF30C}"/>
+          </ac:spMkLst>
+        </pc:spChg>
+        <pc:spChg chg="topLvl">
+          <ac:chgData name="Deborah Shaw" userId="S::deborah_shaw@wycliffeassociates.org::79bf7848-a030-4096-934a-3abbfde4984a" providerId="AD" clId="Web-{29928380-7B1E-50AF-3C64-01669FBDDBFD}" dt="2026-04-13T19:05:12.467" v="8"/>
+          <ac:spMkLst>
+            <pc:docMk/>
+            <pc:sldMk cId="529853859" sldId="340"/>
+            <ac:spMk id="28" creationId="{364623D6-3B23-2F38-9406-2F614755353D}"/>
+          </ac:spMkLst>
+        </pc:spChg>
+        <pc:spChg chg="topLvl">
+          <ac:chgData name="Deborah Shaw" userId="S::deborah_shaw@wycliffeassociates.org::79bf7848-a030-4096-934a-3abbfde4984a" providerId="AD" clId="Web-{29928380-7B1E-50AF-3C64-01669FBDDBFD}" dt="2026-04-13T19:05:16.092" v="9"/>
+          <ac:spMkLst>
+            <pc:docMk/>
+            <pc:sldMk cId="529853859" sldId="340"/>
+            <ac:spMk id="31" creationId="{AF5C2F6D-2653-C4A6-06CB-BE04722832CC}"/>
+          </ac:spMkLst>
+        </pc:spChg>
+      </pc:sldChg>
+    </pc:docChg>
+  </pc:docChgLst>
+  <pc:docChgLst>
+    <pc:chgData name="Deborah Shaw" userId="S::deborah_shaw@wycliffeassociates.org::79bf7848-a030-4096-934a-3abbfde4984a" providerId="AD" clId="Web-{4E654AF0-34A7-3AA0-4B28-FF02C020422B}"/>
+    <pc:docChg chg="modSld">
+      <pc:chgData name="Deborah Shaw" userId="S::deborah_shaw@wycliffeassociates.org::79bf7848-a030-4096-934a-3abbfde4984a" providerId="AD" clId="Web-{4E654AF0-34A7-3AA0-4B28-FF02C020422B}" dt="2026-04-21T17:32:56.833" v="3" actId="20577"/>
+      <pc:docMkLst>
+        <pc:docMk/>
+      </pc:docMkLst>
+      <pc:sldChg chg="delSp modSp delAnim modAnim">
+        <pc:chgData name="Deborah Shaw" userId="S::deborah_shaw@wycliffeassociates.org::79bf7848-a030-4096-934a-3abbfde4984a" providerId="AD" clId="Web-{4E654AF0-34A7-3AA0-4B28-FF02C020422B}" dt="2026-04-21T17:32:56.833" v="3" actId="20577"/>
+        <pc:sldMkLst>
+          <pc:docMk/>
+          <pc:sldMk cId="2899712388" sldId="258"/>
+        </pc:sldMkLst>
+        <pc:spChg chg="mod">
+          <ac:chgData name="Deborah Shaw" userId="S::deborah_shaw@wycliffeassociates.org::79bf7848-a030-4096-934a-3abbfde4984a" providerId="AD" clId="Web-{4E654AF0-34A7-3AA0-4B28-FF02C020422B}" dt="2026-04-21T17:32:56.833" v="3" actId="20577"/>
+          <ac:spMkLst>
+            <pc:docMk/>
+            <pc:sldMk cId="2899712388" sldId="258"/>
+            <ac:spMk id="13" creationId="{4E0F8449-863C-AD40-2FB3-69399181FEEF}"/>
+          </ac:spMkLst>
+        </pc:spChg>
+      </pc:sldChg>
+    </pc:docChg>
+  </pc:docChgLst>
+  <pc:docChgLst>
+    <pc:chgData name="Deborah Shaw" userId="S::deborah_shaw@wycliffeassociates.org::79bf7848-a030-4096-934a-3abbfde4984a" providerId="AD" clId="Web-{5D1BE375-C61C-295B-FA72-2A0FD9E10505}"/>
+    <pc:docChg chg="modSld">
+      <pc:chgData name="Deborah Shaw" userId="S::deborah_shaw@wycliffeassociates.org::79bf7848-a030-4096-934a-3abbfde4984a" providerId="AD" clId="Web-{5D1BE375-C61C-295B-FA72-2A0FD9E10505}" dt="2026-04-08T17:19:32.548" v="0"/>
+      <pc:docMkLst>
+        <pc:docMk/>
+      </pc:docMkLst>
+      <pc:sldChg chg="modSp">
+        <pc:chgData name="Deborah Shaw" userId="S::deborah_shaw@wycliffeassociates.org::79bf7848-a030-4096-934a-3abbfde4984a" providerId="AD" clId="Web-{5D1BE375-C61C-295B-FA72-2A0FD9E10505}" dt="2026-04-08T17:19:32.548" v="0"/>
+        <pc:sldMkLst>
+          <pc:docMk/>
+          <pc:sldMk cId="529853859" sldId="340"/>
+        </pc:sldMkLst>
+        <pc:picChg chg="mod">
+          <ac:chgData name="Deborah Shaw" userId="S::deborah_shaw@wycliffeassociates.org::79bf7848-a030-4096-934a-3abbfde4984a" providerId="AD" clId="Web-{5D1BE375-C61C-295B-FA72-2A0FD9E10505}" dt="2026-04-08T17:19:32.548" v="0"/>
+          <ac:picMkLst>
+            <pc:docMk/>
+            <pc:sldMk cId="529853859" sldId="340"/>
+            <ac:picMk id="1026" creationId="{55AE9C35-A387-5394-28A4-6237975BD5E5}"/>
+          </ac:picMkLst>
+        </pc:picChg>
+      </pc:sldChg>
+    </pc:docChg>
+  </pc:docChgLst>
+  <pc:docChgLst>
+    <pc:chgData name="Deborah Shaw" userId="S::deborah_shaw@wycliffeassociates.org::79bf7848-a030-4096-934a-3abbfde4984a" providerId="AD" clId="Web-{BCFA5DC7-44C7-9CBF-05A1-B7F94CA9C845}"/>
+    <pc:docChg chg="modSld">
+      <pc:chgData name="Deborah Shaw" userId="S::deborah_shaw@wycliffeassociates.org::79bf7848-a030-4096-934a-3abbfde4984a" providerId="AD" clId="Web-{BCFA5DC7-44C7-9CBF-05A1-B7F94CA9C845}" dt="2026-04-13T20:41:57.309" v="2" actId="1076"/>
+      <pc:docMkLst>
+        <pc:docMk/>
+      </pc:docMkLst>
+      <pc:sldChg chg="modSp">
+        <pc:chgData name="Deborah Shaw" userId="S::deborah_shaw@wycliffeassociates.org::79bf7848-a030-4096-934a-3abbfde4984a" providerId="AD" clId="Web-{BCFA5DC7-44C7-9CBF-05A1-B7F94CA9C845}" dt="2026-04-13T20:41:57.309" v="2" actId="1076"/>
+        <pc:sldMkLst>
+          <pc:docMk/>
+          <pc:sldMk cId="3604494224" sldId="287"/>
+        </pc:sldMkLst>
+        <pc:picChg chg="mod">
+          <ac:chgData name="Deborah Shaw" userId="S::deborah_shaw@wycliffeassociates.org::79bf7848-a030-4096-934a-3abbfde4984a" providerId="AD" clId="Web-{BCFA5DC7-44C7-9CBF-05A1-B7F94CA9C845}" dt="2026-04-13T20:41:57.309" v="2" actId="1076"/>
+          <ac:picMkLst>
+            <pc:docMk/>
+            <pc:sldMk cId="3604494224" sldId="287"/>
+            <ac:picMk id="2" creationId="{389F3353-587C-37FF-1E5F-DFAE44B9D6C1}"/>
+          </ac:picMkLst>
+        </pc:picChg>
+      </pc:sldChg>
+    </pc:docChg>
+  </pc:docChgLst>
+  <pc:docChgLst>
+    <pc:chgData name="Deborah Shaw" userId="S::deborah_shaw@wycliffeassociates.org::79bf7848-a030-4096-934a-3abbfde4984a" providerId="AD" clId="Web-{1F6F1FE7-71EB-CC06-F5B8-949D3E693371}"/>
+    <pc:docChg chg="modSld">
+      <pc:chgData name="Deborah Shaw" userId="S::deborah_shaw@wycliffeassociates.org::79bf7848-a030-4096-934a-3abbfde4984a" providerId="AD" clId="Web-{1F6F1FE7-71EB-CC06-F5B8-949D3E693371}" dt="2026-04-08T16:33:58.358" v="5"/>
+      <pc:docMkLst>
+        <pc:docMk/>
+      </pc:docMkLst>
+      <pc:sldChg chg="modSp">
+        <pc:chgData name="Deborah Shaw" userId="S::deborah_shaw@wycliffeassociates.org::79bf7848-a030-4096-934a-3abbfde4984a" providerId="AD" clId="Web-{1F6F1FE7-71EB-CC06-F5B8-949D3E693371}" dt="2026-04-08T16:33:58.358" v="5"/>
+        <pc:sldMkLst>
+          <pc:docMk/>
+          <pc:sldMk cId="529853859" sldId="340"/>
+        </pc:sldMkLst>
+        <pc:picChg chg="mod modCrop">
+          <ac:chgData name="Deborah Shaw" userId="S::deborah_shaw@wycliffeassociates.org::79bf7848-a030-4096-934a-3abbfde4984a" providerId="AD" clId="Web-{1F6F1FE7-71EB-CC06-F5B8-949D3E693371}" dt="2026-04-08T16:33:58.358" v="5"/>
+          <ac:picMkLst>
+            <pc:docMk/>
+            <pc:sldMk cId="529853859" sldId="340"/>
+            <ac:picMk id="1026" creationId="{55AE9C35-A387-5394-28A4-6237975BD5E5}"/>
+          </ac:picMkLst>
+        </pc:picChg>
+      </pc:sldChg>
+    </pc:docChg>
+  </pc:docChgLst>
+</pc:chgInfo>
 </file>
 
 <file path=ppt/notesMasters/notesMaster1.xml><?xml version="1.0" encoding="utf-8"?>
@@ -235,7 +646,7 @@
           <a:p>
             <a:fld id="{AC6AA070-92F4-A447-BB88-F5E94FF9CF8B}" type="datetimeFigureOut">
               <a:rPr lang="en-US" smtClean="0"/>
-              <a:t>10/23/25</a:t>
+              <a:t>5/6/2026</a:t>
             </a:fld>
             <a:endParaRPr lang="en-US"/>
           </a:p>
@@ -978,7 +1389,7 @@
           <a:p>
             <a:fld id="{2D176C0A-5C67-429D-B78E-C0F7FE360763}" type="datetimeFigureOut">
               <a:rPr lang="en-US" smtClean="0"/>
-              <a:t>10/23/25</a:t>
+              <a:t>5/6/2026</a:t>
             </a:fld>
             <a:endParaRPr lang="en-US"/>
           </a:p>
@@ -3081,50 +3492,6 @@
       </p:sp>
       <p:sp>
         <p:nvSpPr>
-          <p:cNvPr id="27" name="Oval 26">
-            <a:extLst>
-              <a:ext uri="{FF2B5EF4-FFF2-40B4-BE49-F238E27FC236}">
-                <a16:creationId xmlns:a16="http://schemas.microsoft.com/office/drawing/2014/main" id="{BA3912D5-7016-8975-B81B-A5E90825A640}"/>
-              </a:ext>
-            </a:extLst>
-          </p:cNvPr>
-          <p:cNvSpPr/>
-          <p:nvPr/>
-        </p:nvSpPr>
-        <p:spPr>
-          <a:xfrm>
-            <a:off x="1199507" y="2520778"/>
-            <a:ext cx="0" cy="182880"/>
-          </a:xfrm>
-          <a:prstGeom prst="ellipse">
-            <a:avLst/>
-          </a:prstGeom>
-          <a:solidFill>
-            <a:schemeClr val="tx2"/>
-          </a:solidFill>
-          <a:ln>
-            <a:noFill/>
-          </a:ln>
-        </p:spPr>
-        <p:txBody>
-          <a:bodyPr wrap="square" rtlCol="0" anchor="ctr">
-            <a:spAutoFit/>
-          </a:bodyPr>
-          <a:lstStyle/>
-          <a:p>
-            <a:pPr algn="ctr"/>
-            <a:endParaRPr lang="en-US" sz="2000">
-              <a:solidFill>
-                <a:srgbClr val="716557"/>
-              </a:solidFill>
-              <a:latin typeface="Arial" panose="020B0604020202020204" pitchFamily="34" charset="0"/>
-              <a:cs typeface="Arial" panose="020B0604020202020204" pitchFamily="34" charset="0"/>
-            </a:endParaRPr>
-          </a:p>
-        </p:txBody>
-      </p:sp>
-      <p:sp>
-        <p:nvSpPr>
           <p:cNvPr id="9" name="TextBox 8">
             <a:extLst>
               <a:ext uri="{FF2B5EF4-FFF2-40B4-BE49-F238E27FC236}">
@@ -3137,8 +3504,8 @@
         </p:nvSpPr>
         <p:spPr>
           <a:xfrm>
-            <a:off x="597648" y="1910874"/>
-            <a:ext cx="8353586" cy="4124206"/>
+            <a:off x="396365" y="1709591"/>
+            <a:ext cx="8353586" cy="4924425"/>
           </a:xfrm>
           <a:prstGeom prst="rect">
             <a:avLst/>
@@ -3146,7 +3513,7 @@
           <a:noFill/>
         </p:spPr>
         <p:txBody>
-          <a:bodyPr wrap="square" rtlCol="0">
+          <a:bodyPr wrap="square" lIns="91440" tIns="45720" rIns="91440" bIns="45720" rtlCol="0" anchor="t">
             <a:spAutoFit/>
           </a:bodyPr>
           <a:lstStyle/>
@@ -3182,7 +3549,7 @@
               <a:buChar char="•"/>
             </a:pPr>
             <a:r>
-              <a:rPr lang="en-US" sz="2600" b="1" dirty="0">
+              <a:rPr lang="en-US" sz="2600" b="1">
                 <a:solidFill>
                   <a:schemeClr val="accent2"/>
                 </a:solidFill>
@@ -3196,10 +3563,11 @@
                 </a:solidFill>
               </a:rPr>
             </a:br>
-            <a:endParaRPr lang="en-US" sz="2600" b="1" dirty="0">
+            <a:endParaRPr lang="en-US" sz="2600" b="1">
               <a:solidFill>
                 <a:schemeClr val="accent2"/>
               </a:solidFill>
+              <a:cs typeface="Arial"/>
             </a:endParaRPr>
           </a:p>
           <a:p>
@@ -3213,8 +3581,52 @@
                   <a:schemeClr val="accent2"/>
                 </a:solidFill>
               </a:rPr>
+              <a:t>Divine Familial Terms </a:t>
+            </a:r>
+            <a:r>
+              <a:rPr lang="en-US" sz="2600" b="1">
+                <a:solidFill>
+                  <a:schemeClr val="accent2"/>
+                </a:solidFill>
+              </a:rPr>
+              <a:t>Tables (when needed)</a:t>
+            </a:r>
+            <a:endParaRPr lang="en-US" sz="2600" b="1" dirty="0">
+              <a:solidFill>
+                <a:schemeClr val="accent2"/>
+              </a:solidFill>
+            </a:endParaRPr>
+          </a:p>
+          <a:p>
+            <a:pPr marL="285750" indent="-285750">
+              <a:buFont typeface="Arial" panose="020B0604020202020204" pitchFamily="34" charset="0"/>
+              <a:buChar char="•"/>
+            </a:pPr>
+            <a:endParaRPr lang="en-US" sz="2600" b="1" dirty="0">
+              <a:solidFill>
+                <a:schemeClr val="accent2"/>
+              </a:solidFill>
+            </a:endParaRPr>
+          </a:p>
+          <a:p>
+            <a:pPr marL="285750" indent="-285750">
+              <a:buFont typeface="Arial" panose="020B0604020202020204" pitchFamily="34" charset="0"/>
+              <a:buChar char="•"/>
+            </a:pPr>
+            <a:r>
+              <a:rPr lang="en-US" sz="2600" b="1">
+                <a:solidFill>
+                  <a:schemeClr val="accent2"/>
+                </a:solidFill>
+              </a:rPr>
               <a:t>Reviewers’ Guide</a:t>
             </a:r>
+            <a:endParaRPr lang="en-US" sz="2600" b="1">
+              <a:solidFill>
+                <a:schemeClr val="accent2"/>
+              </a:solidFill>
+              <a:cs typeface="Arial"/>
+            </a:endParaRPr>
           </a:p>
           <a:p>
             <a:pPr marL="285750" indent="-285750">
@@ -3276,47 +3688,6 @@
               <a:solidFill>
                 <a:schemeClr val="accent2"/>
               </a:solidFill>
-            </a:endParaRPr>
-          </a:p>
-        </p:txBody>
-      </p:sp>
-      <p:sp>
-        <p:nvSpPr>
-          <p:cNvPr id="10" name="Rectangle 9">
-            <a:extLst>
-              <a:ext uri="{FF2B5EF4-FFF2-40B4-BE49-F238E27FC236}">
-                <a16:creationId xmlns:a16="http://schemas.microsoft.com/office/drawing/2014/main" id="{37D8F3D8-3018-31C4-3362-4A63FCC5FC2E}"/>
-              </a:ext>
-            </a:extLst>
-          </p:cNvPr>
-          <p:cNvSpPr/>
-          <p:nvPr/>
-        </p:nvSpPr>
-        <p:spPr>
-          <a:xfrm>
-            <a:off x="4556499" y="1910874"/>
-            <a:ext cx="4355020" cy="662782"/>
-          </a:xfrm>
-          <a:prstGeom prst="rect">
-            <a:avLst/>
-          </a:prstGeom>
-          <a:solidFill>
-            <a:schemeClr val="bg1"/>
-          </a:solidFill>
-        </p:spPr>
-        <p:txBody>
-          <a:bodyPr wrap="square" rtlCol="0" anchor="ctr">
-            <a:spAutoFit/>
-          </a:bodyPr>
-          <a:lstStyle/>
-          <a:p>
-            <a:pPr algn="ctr"/>
-            <a:endParaRPr lang="en-US" sz="2000">
-              <a:solidFill>
-                <a:srgbClr val="716557"/>
-              </a:solidFill>
-              <a:latin typeface="Arial" panose="020B0604020202020204" pitchFamily="34" charset="0"/>
-              <a:cs typeface="Arial" panose="020B0604020202020204" pitchFamily="34" charset="0"/>
             </a:endParaRPr>
           </a:p>
         </p:txBody>
@@ -3499,7 +3870,7 @@
                             </p:stCondLst>
                             <p:childTnLst>
                               <p:par>
-                                <p:cTn id="17" presetID="1" presetClass="exit" presetSubtype="0" fill="hold" grpId="0" nodeType="clickEffect">
+                                <p:cTn id="17" presetID="1" presetClass="entr" presetSubtype="0" fill="hold" nodeType="clickEffect">
                                   <p:stCondLst>
                                     <p:cond delay="0"/>
                                   </p:stCondLst>
@@ -3512,14 +3883,18 @@
                                           </p:stCondLst>
                                         </p:cTn>
                                         <p:tgtEl>
-                                          <p:spTgt spid="10"/>
+                                          <p:spTgt spid="9">
+                                            <p:txEl>
+                                              <p:pRg st="4" end="4"/>
+                                            </p:txEl>
+                                          </p:spTgt>
                                         </p:tgtEl>
                                         <p:attrNameLst>
                                           <p:attrName>style.visibility</p:attrName>
                                         </p:attrNameLst>
                                       </p:cBhvr>
                                       <p:to>
-                                        <p:strVal val="hidden"/>
+                                        <p:strVal val="visible"/>
                                       </p:to>
                                     </p:set>
                                   </p:childTnLst>
@@ -3559,7 +3934,7 @@
                                         <p:tgtEl>
                                           <p:spTgt spid="9">
                                             <p:txEl>
-                                              <p:pRg st="4" end="4"/>
+                                              <p:pRg st="6" end="6"/>
                                             </p:txEl>
                                           </p:spTgt>
                                         </p:tgtEl>
@@ -3608,7 +3983,7 @@
                                         <p:tgtEl>
                                           <p:spTgt spid="9">
                                             <p:txEl>
-                                              <p:pRg st="5" end="5"/>
+                                              <p:pRg st="7" end="7"/>
                                             </p:txEl>
                                           </p:spTgt>
                                         </p:tgtEl>
@@ -3650,9 +4025,6 @@
         </p:cTn>
       </p:par>
     </p:tnLst>
-    <p:bldLst>
-      <p:bldP spid="10" grpId="0" animBg="1"/>
-    </p:bldLst>
   </p:timing>
 </p:sld>
 </file>
@@ -3844,13 +4216,15 @@
               </a:ext>
             </a:extLst>
           </a:blip>
-          <a:srcRect t="12146" b="12146"/>
-          <a:stretch/>
+          <a:srcRect l="7217" t="16146" r="41826" b="36979"/>
+          <a:stretch>
+            <a:fillRect/>
+          </a:stretch>
         </p:blipFill>
         <p:spPr>
           <a:xfrm>
-            <a:off x="1706227" y="2256587"/>
-            <a:ext cx="5731545" cy="2892829"/>
+            <a:off x="1773134" y="1708311"/>
+            <a:ext cx="5604808" cy="3441425"/>
           </a:xfrm>
           <a:prstGeom prst="roundRect">
             <a:avLst>
@@ -4181,7 +4555,7 @@
           <a:p>
             <a:pPr algn="ctr"/>
             <a:r>
-              <a:rPr lang="en-US" sz="3000" b="1">
+              <a:rPr lang="en-US" sz="3000" b="1" dirty="0">
                 <a:solidFill>
                   <a:schemeClr val="bg1"/>
                 </a:solidFill>
@@ -4241,7 +4615,7 @@
         </p:nvSpPr>
         <p:spPr>
           <a:xfrm>
-            <a:off x="2286024" y="1577970"/>
+            <a:off x="1831043" y="1577970"/>
             <a:ext cx="914400" cy="731520"/>
           </a:xfrm>
           <a:prstGeom prst="downArrow">
@@ -4285,7 +4659,7 @@
         </p:nvSpPr>
         <p:spPr>
           <a:xfrm>
-            <a:off x="7141753" y="1583011"/>
+            <a:off x="7141443" y="1577970"/>
             <a:ext cx="343027" cy="731520"/>
           </a:xfrm>
           <a:prstGeom prst="downArrow">
@@ -4308,14 +4682,14 @@
           <a:p>
             <a:pPr algn="ctr"/>
             <a:r>
-              <a:rPr lang="en-US" sz="2000" b="1">
+              <a:rPr lang="en-US" sz="2000" b="1" dirty="0">
                 <a:solidFill>
                   <a:schemeClr val="bg1"/>
                 </a:solidFill>
                 <a:latin typeface="Arial" panose="020B0604020202020204" pitchFamily="34" charset="0"/>
                 <a:cs typeface="Arial" panose="020B0604020202020204" pitchFamily="34" charset="0"/>
               </a:rPr>
-              <a:t>4</a:t>
+              <a:t>5</a:t>
             </a:r>
           </a:p>
         </p:txBody>
@@ -4334,8 +4708,8 @@
         </p:nvSpPr>
         <p:spPr>
           <a:xfrm>
-            <a:off x="123027" y="4240755"/>
-            <a:ext cx="9031266" cy="2246769"/>
+            <a:off x="111930" y="3807969"/>
+            <a:ext cx="9031266" cy="2708434"/>
           </a:xfrm>
           <a:prstGeom prst="rect">
             <a:avLst/>
@@ -4343,7 +4717,7 @@
           <a:noFill/>
         </p:spPr>
         <p:txBody>
-          <a:bodyPr wrap="square" rtlCol="0">
+          <a:bodyPr wrap="square" lIns="91440" tIns="45720" rIns="91440" bIns="45720" rtlCol="0" anchor="t">
             <a:spAutoFit/>
           </a:bodyPr>
           <a:lstStyle/>
@@ -4388,8 +4762,24 @@
                 <a:solidFill>
                   <a:srgbClr val="005595"/>
                 </a:solidFill>
+                <a:cs typeface="Arial"/>
               </a:rPr>
-              <a:t>3. </a:t>
+              <a:t>3. Divine Familial Terms Tables    Translators (in areas with issues)</a:t>
+            </a:r>
+          </a:p>
+          <a:p>
+            <a:pPr>
+              <a:spcBef>
+                <a:spcPts val="600"/>
+              </a:spcBef>
+            </a:pPr>
+            <a:r>
+              <a:rPr lang="en-US" sz="2000" b="1" dirty="0">
+                <a:solidFill>
+                  <a:srgbClr val="005595"/>
+                </a:solidFill>
+              </a:rPr>
+              <a:t>4. </a:t>
             </a:r>
             <a:r>
               <a:rPr lang="en-US" sz="2000" b="1" dirty="0">
@@ -4401,13 +4791,13 @@
               </a:rPr>
               <a:t>Reviewers’ Guide					Believers who were not translators</a:t>
             </a:r>
-            <a:br>
-              <a:rPr lang="en-US" sz="2000" b="1" dirty="0">
-                <a:solidFill>
-                  <a:srgbClr val="005595"/>
-                </a:solidFill>
-              </a:rPr>
-            </a:br>
+          </a:p>
+          <a:p>
+            <a:pPr>
+              <a:spcBef>
+                <a:spcPts val="600"/>
+              </a:spcBef>
+            </a:pPr>
             <a:r>
               <a:rPr lang="en-US" sz="2000" b="1" dirty="0">
                 <a:solidFill>
@@ -4429,7 +4819,7 @@
                   <a:srgbClr val="005595"/>
                 </a:solidFill>
               </a:rPr>
-              <a:t>4. Spiritual Terms Evaluation tool		Translators, with </a:t>
+              <a:t>5. Spiritual Terms Evaluation tool		Translators, with </a:t>
             </a:r>
             <a:r>
               <a:rPr lang="en-US" sz="2000" b="1" dirty="0"/>
@@ -4448,8 +4838,14 @@
                   <a:srgbClr val="005595"/>
                 </a:solidFill>
               </a:rPr>
-              <a:t>5. Proofreading Checklist				One or two translators</a:t>
+              <a:t>6. Proofreading Checklist				One or more translators</a:t>
             </a:r>
+            <a:endParaRPr lang="en-US" sz="2000" b="1" dirty="0">
+              <a:solidFill>
+                <a:srgbClr val="005595"/>
+              </a:solidFill>
+              <a:cs typeface="Arial"/>
+            </a:endParaRPr>
           </a:p>
         </p:txBody>
       </p:sp>
@@ -4467,7 +4863,7 @@
         </p:nvSpPr>
         <p:spPr>
           <a:xfrm>
-            <a:off x="7582316" y="1577970"/>
+            <a:off x="7652053" y="1577970"/>
             <a:ext cx="343027" cy="731520"/>
           </a:xfrm>
           <a:prstGeom prst="downArrow">
@@ -4485,14 +4881,14 @@
           <a:p>
             <a:pPr algn="ctr"/>
             <a:r>
-              <a:rPr lang="en-US" sz="2000" b="1">
+              <a:rPr lang="en-US" sz="2000" b="1" dirty="0">
                 <a:solidFill>
                   <a:schemeClr val="bg1"/>
                 </a:solidFill>
                 <a:latin typeface="Arial" panose="020B0604020202020204" pitchFamily="34" charset="0"/>
                 <a:cs typeface="Arial" panose="020B0604020202020204" pitchFamily="34" charset="0"/>
               </a:rPr>
-              <a:t>5</a:t>
+              <a:t>6</a:t>
             </a:r>
           </a:p>
         </p:txBody>
@@ -4511,7 +4907,7 @@
         </p:nvSpPr>
         <p:spPr>
           <a:xfrm>
-            <a:off x="3305015" y="1577970"/>
+            <a:off x="3005394" y="1577970"/>
             <a:ext cx="914400" cy="731520"/>
           </a:xfrm>
           <a:prstGeom prst="downArrow">
@@ -4577,47 +4973,6 @@
             <a:endParaRPr lang="en-US" sz="2000" b="1">
               <a:solidFill>
                 <a:schemeClr val="bg1"/>
-              </a:solidFill>
-              <a:latin typeface="Arial" panose="020B0604020202020204" pitchFamily="34" charset="0"/>
-              <a:cs typeface="Arial" panose="020B0604020202020204" pitchFamily="34" charset="0"/>
-            </a:endParaRPr>
-          </a:p>
-        </p:txBody>
-      </p:sp>
-      <p:sp>
-        <p:nvSpPr>
-          <p:cNvPr id="17" name="Rectangle 16">
-            <a:extLst>
-              <a:ext uri="{FF2B5EF4-FFF2-40B4-BE49-F238E27FC236}">
-                <a16:creationId xmlns:a16="http://schemas.microsoft.com/office/drawing/2014/main" id="{E18D95AB-339B-17D2-FE39-99B8DA4CBFE0}"/>
-              </a:ext>
-            </a:extLst>
-          </p:cNvPr>
-          <p:cNvSpPr/>
-          <p:nvPr/>
-        </p:nvSpPr>
-        <p:spPr>
-          <a:xfrm>
-            <a:off x="4759890" y="5364139"/>
-            <a:ext cx="2720881" cy="297625"/>
-          </a:xfrm>
-          <a:prstGeom prst="rect">
-            <a:avLst/>
-          </a:prstGeom>
-          <a:solidFill>
-            <a:schemeClr val="bg1"/>
-          </a:solidFill>
-        </p:spPr>
-        <p:txBody>
-          <a:bodyPr rtlCol="0" anchor="ctr">
-            <a:spAutoFit/>
-          </a:bodyPr>
-          <a:lstStyle/>
-          <a:p>
-            <a:pPr algn="ctr"/>
-            <a:endParaRPr lang="en-US" sz="2000">
-              <a:solidFill>
-                <a:srgbClr val="716557"/>
               </a:solidFill>
               <a:latin typeface="Arial" panose="020B0604020202020204" pitchFamily="34" charset="0"/>
               <a:cs typeface="Arial" panose="020B0604020202020204" pitchFamily="34" charset="0"/>
@@ -4695,10 +5050,54 @@
           <a:lstStyle/>
           <a:p>
             <a:r>
-              <a:rPr lang="en-US" sz="2000" b="1">
+              <a:rPr lang="en-US" sz="2000" b="1" dirty="0">
                 <a:solidFill>
                   <a:schemeClr val="bg1"/>
                 </a:solidFill>
+              </a:rPr>
+              <a:t>4</a:t>
+            </a:r>
+          </a:p>
+        </p:txBody>
+      </p:sp>
+      <p:sp>
+        <p:nvSpPr>
+          <p:cNvPr id="17" name="Down Arrow 13">
+            <a:extLst>
+              <a:ext uri="{FF2B5EF4-FFF2-40B4-BE49-F238E27FC236}">
+                <a16:creationId xmlns:a16="http://schemas.microsoft.com/office/drawing/2014/main" id="{8C9C3E0C-359C-72FA-1D42-31AB0BF55E1D}"/>
+              </a:ext>
+            </a:extLst>
+          </p:cNvPr>
+          <p:cNvSpPr/>
+          <p:nvPr/>
+        </p:nvSpPr>
+        <p:spPr>
+          <a:xfrm>
+            <a:off x="4178726" y="1577970"/>
+            <a:ext cx="914400" cy="731520"/>
+          </a:xfrm>
+          <a:prstGeom prst="downArrow">
+            <a:avLst/>
+          </a:prstGeom>
+          <a:solidFill>
+            <a:srgbClr val="005595"/>
+          </a:solidFill>
+        </p:spPr>
+        <p:txBody>
+          <a:bodyPr wrap="square" rtlCol="0" anchor="ctr">
+            <a:spAutoFit/>
+          </a:bodyPr>
+          <a:lstStyle/>
+          <a:p>
+            <a:pPr algn="ctr"/>
+            <a:r>
+              <a:rPr lang="en-US" sz="2000" b="1" dirty="0">
+                <a:solidFill>
+                  <a:schemeClr val="bg1"/>
+                </a:solidFill>
+                <a:latin typeface="Arial" panose="020B0604020202020204" pitchFamily="34" charset="0"/>
+                <a:cs typeface="Arial" panose="020B0604020202020204" pitchFamily="34" charset="0"/>
               </a:rPr>
               <a:t>3</a:t>
             </a:r>
@@ -5041,7 +5440,7 @@
                                           </p:stCondLst>
                                         </p:cTn>
                                         <p:tgtEl>
-                                          <p:spTgt spid="10"/>
+                                          <p:spTgt spid="17"/>
                                         </p:tgtEl>
                                         <p:attrNameLst>
                                           <p:attrName>style.visibility</p:attrName>
@@ -5055,7 +5454,7 @@
                                       <p:cBhvr additive="base">
                                         <p:cTn id="27" dur="500"/>
                                         <p:tgtEl>
-                                          <p:spTgt spid="10"/>
+                                          <p:spTgt spid="17"/>
                                         </p:tgtEl>
                                         <p:attrNameLst>
                                           <p:attrName>ppt_y</p:attrName>
@@ -5078,7 +5477,7 @@
                                       <p:cBhvr>
                                         <p:cTn id="28" dur="500"/>
                                         <p:tgtEl>
-                                          <p:spTgt spid="10"/>
+                                          <p:spTgt spid="17"/>
                                         </p:tgtEl>
                                       </p:cBhvr>
                                     </p:animEffect>
@@ -5187,7 +5586,7 @@
                                           </p:stCondLst>
                                         </p:cTn>
                                         <p:tgtEl>
-                                          <p:spTgt spid="16"/>
+                                          <p:spTgt spid="10"/>
                                         </p:tgtEl>
                                         <p:attrNameLst>
                                           <p:attrName>style.visibility</p:attrName>
@@ -5201,7 +5600,7 @@
                                       <p:cBhvr additive="base">
                                         <p:cTn id="37" dur="500"/>
                                         <p:tgtEl>
-                                          <p:spTgt spid="16"/>
+                                          <p:spTgt spid="10"/>
                                         </p:tgtEl>
                                         <p:attrNameLst>
                                           <p:attrName>ppt_y</p:attrName>
@@ -5224,7 +5623,7 @@
                                       <p:cBhvr>
                                         <p:cTn id="38" dur="500"/>
                                         <p:tgtEl>
-                                          <p:spTgt spid="16"/>
+                                          <p:spTgt spid="10"/>
                                         </p:tgtEl>
                                       </p:cBhvr>
                                     </p:animEffect>
@@ -5232,7 +5631,7 @@
                                 </p:cTn>
                               </p:par>
                               <p:par>
-                                <p:cTn id="39" presetID="1" presetClass="exit" presetSubtype="0" fill="hold" grpId="0" nodeType="withEffect">
+                                <p:cTn id="39" presetID="12" presetClass="entr" presetSubtype="8" fill="hold" nodeType="withEffect">
                                   <p:stCondLst>
                                     <p:cond delay="0"/>
                                   </p:stCondLst>
@@ -5240,109 +5639,6 @@
                                     <p:set>
                                       <p:cBhvr>
                                         <p:cTn id="40" dur="1" fill="hold">
-                                          <p:stCondLst>
-                                            <p:cond delay="0"/>
-                                          </p:stCondLst>
-                                        </p:cTn>
-                                        <p:tgtEl>
-                                          <p:spTgt spid="17"/>
-                                        </p:tgtEl>
-                                        <p:attrNameLst>
-                                          <p:attrName>style.visibility</p:attrName>
-                                        </p:attrNameLst>
-                                      </p:cBhvr>
-                                      <p:to>
-                                        <p:strVal val="hidden"/>
-                                      </p:to>
-                                    </p:set>
-                                  </p:childTnLst>
-                                </p:cTn>
-                              </p:par>
-                            </p:childTnLst>
-                          </p:cTn>
-                        </p:par>
-                      </p:childTnLst>
-                    </p:cTn>
-                  </p:par>
-                  <p:par>
-                    <p:cTn id="41" fill="hold">
-                      <p:stCondLst>
-                        <p:cond delay="indefinite"/>
-                      </p:stCondLst>
-                      <p:childTnLst>
-                        <p:par>
-                          <p:cTn id="42" fill="hold">
-                            <p:stCondLst>
-                              <p:cond delay="0"/>
-                            </p:stCondLst>
-                            <p:childTnLst>
-                              <p:par>
-                                <p:cTn id="43" presetID="12" presetClass="entr" presetSubtype="1" fill="hold" grpId="0" nodeType="clickEffect">
-                                  <p:stCondLst>
-                                    <p:cond delay="0"/>
-                                  </p:stCondLst>
-                                  <p:childTnLst>
-                                    <p:set>
-                                      <p:cBhvr>
-                                        <p:cTn id="44" dur="1" fill="hold">
-                                          <p:stCondLst>
-                                            <p:cond delay="0"/>
-                                          </p:stCondLst>
-                                        </p:cTn>
-                                        <p:tgtEl>
-                                          <p:spTgt spid="9"/>
-                                        </p:tgtEl>
-                                        <p:attrNameLst>
-                                          <p:attrName>style.visibility</p:attrName>
-                                        </p:attrNameLst>
-                                      </p:cBhvr>
-                                      <p:to>
-                                        <p:strVal val="visible"/>
-                                      </p:to>
-                                    </p:set>
-                                    <p:anim calcmode="lin" valueType="num">
-                                      <p:cBhvr additive="base">
-                                        <p:cTn id="45" dur="500"/>
-                                        <p:tgtEl>
-                                          <p:spTgt spid="9"/>
-                                        </p:tgtEl>
-                                        <p:attrNameLst>
-                                          <p:attrName>ppt_y</p:attrName>
-                                        </p:attrNameLst>
-                                      </p:cBhvr>
-                                      <p:tavLst>
-                                        <p:tav tm="0">
-                                          <p:val>
-                                            <p:strVal val="#ppt_y-#ppt_h*1.125000"/>
-                                          </p:val>
-                                        </p:tav>
-                                        <p:tav tm="100000">
-                                          <p:val>
-                                            <p:strVal val="#ppt_y"/>
-                                          </p:val>
-                                        </p:tav>
-                                      </p:tavLst>
-                                    </p:anim>
-                                    <p:animEffect transition="in" filter="wipe(down)">
-                                      <p:cBhvr>
-                                        <p:cTn id="46" dur="500"/>
-                                        <p:tgtEl>
-                                          <p:spTgt spid="9"/>
-                                        </p:tgtEl>
-                                      </p:cBhvr>
-                                    </p:animEffect>
-                                  </p:childTnLst>
-                                </p:cTn>
-                              </p:par>
-                              <p:par>
-                                <p:cTn id="47" presetID="12" presetClass="entr" presetSubtype="8" fill="hold" nodeType="withEffect">
-                                  <p:stCondLst>
-                                    <p:cond delay="0"/>
-                                  </p:stCondLst>
-                                  <p:childTnLst>
-                                    <p:set>
-                                      <p:cBhvr>
-                                        <p:cTn id="48" dur="1" fill="hold">
                                           <p:stCondLst>
                                             <p:cond delay="0"/>
                                           </p:stCondLst>
@@ -5364,7 +5660,7 @@
                                     </p:set>
                                     <p:anim calcmode="lin" valueType="num">
                                       <p:cBhvr additive="base">
-                                        <p:cTn id="49" dur="500"/>
+                                        <p:cTn id="41" dur="500"/>
                                         <p:tgtEl>
                                           <p:spTgt spid="13">
                                             <p:txEl>
@@ -5391,7 +5687,7 @@
                                     </p:anim>
                                     <p:animEffect transition="in" filter="wipe(right)">
                                       <p:cBhvr>
-                                        <p:cTn id="50" dur="500"/>
+                                        <p:cTn id="42" dur="500"/>
                                         <p:tgtEl>
                                           <p:spTgt spid="13">
                                             <p:txEl>
@@ -5407,88 +5703,21 @@
                             </p:childTnLst>
                           </p:cTn>
                         </p:par>
-                      </p:childTnLst>
-                    </p:cTn>
-                  </p:par>
-                  <p:par>
-                    <p:cTn id="51" fill="hold">
-                      <p:stCondLst>
-                        <p:cond delay="indefinite"/>
-                      </p:stCondLst>
-                      <p:childTnLst>
                         <p:par>
-                          <p:cTn id="52" fill="hold">
+                          <p:cTn id="43" fill="hold">
                             <p:stCondLst>
-                              <p:cond delay="0"/>
+                              <p:cond delay="500"/>
                             </p:stCondLst>
                             <p:childTnLst>
                               <p:par>
-                                <p:cTn id="53" presetID="12" presetClass="entr" presetSubtype="1" fill="hold" grpId="0" nodeType="clickEffect">
+                                <p:cTn id="44" presetID="12" presetClass="entr" presetSubtype="8" fill="hold" nodeType="afterEffect">
                                   <p:stCondLst>
                                     <p:cond delay="0"/>
                                   </p:stCondLst>
                                   <p:childTnLst>
                                     <p:set>
                                       <p:cBhvr>
-                                        <p:cTn id="54" dur="1" fill="hold">
-                                          <p:stCondLst>
-                                            <p:cond delay="0"/>
-                                          </p:stCondLst>
-                                        </p:cTn>
-                                        <p:tgtEl>
-                                          <p:spTgt spid="11"/>
-                                        </p:tgtEl>
-                                        <p:attrNameLst>
-                                          <p:attrName>style.visibility</p:attrName>
-                                        </p:attrNameLst>
-                                      </p:cBhvr>
-                                      <p:to>
-                                        <p:strVal val="visible"/>
-                                      </p:to>
-                                    </p:set>
-                                    <p:anim calcmode="lin" valueType="num">
-                                      <p:cBhvr additive="base">
-                                        <p:cTn id="55" dur="500"/>
-                                        <p:tgtEl>
-                                          <p:spTgt spid="11"/>
-                                        </p:tgtEl>
-                                        <p:attrNameLst>
-                                          <p:attrName>ppt_y</p:attrName>
-                                        </p:attrNameLst>
-                                      </p:cBhvr>
-                                      <p:tavLst>
-                                        <p:tav tm="0">
-                                          <p:val>
-                                            <p:strVal val="#ppt_y-#ppt_h*1.125000"/>
-                                          </p:val>
-                                        </p:tav>
-                                        <p:tav tm="100000">
-                                          <p:val>
-                                            <p:strVal val="#ppt_y"/>
-                                          </p:val>
-                                        </p:tav>
-                                      </p:tavLst>
-                                    </p:anim>
-                                    <p:animEffect transition="in" filter="wipe(down)">
-                                      <p:cBhvr>
-                                        <p:cTn id="56" dur="500"/>
-                                        <p:tgtEl>
-                                          <p:spTgt spid="11"/>
-                                        </p:tgtEl>
-                                      </p:cBhvr>
-                                    </p:animEffect>
-                                  </p:childTnLst>
-                                </p:cTn>
-                              </p:par>
-                              <p:par>
-                                <p:cTn id="57" presetID="12" presetClass="entr" presetSubtype="8" fill="hold" nodeType="withEffect">
-                                  <p:stCondLst>
-                                    <p:cond delay="0"/>
-                                  </p:stCondLst>
-                                  <p:childTnLst>
-                                    <p:set>
-                                      <p:cBhvr>
-                                        <p:cTn id="58" dur="1" fill="hold">
+                                        <p:cTn id="45" dur="1" fill="hold">
                                           <p:stCondLst>
                                             <p:cond delay="0"/>
                                           </p:stCondLst>
@@ -5510,7 +5739,7 @@
                                     </p:set>
                                     <p:anim calcmode="lin" valueType="num">
                                       <p:cBhvr additive="base">
-                                        <p:cTn id="59" dur="500"/>
+                                        <p:cTn id="46" dur="500"/>
                                         <p:tgtEl>
                                           <p:spTgt spid="13">
                                             <p:txEl>
@@ -5537,11 +5766,361 @@
                                     </p:anim>
                                     <p:animEffect transition="in" filter="wipe(right)">
                                       <p:cBhvr>
+                                        <p:cTn id="47" dur="500"/>
+                                        <p:tgtEl>
+                                          <p:spTgt spid="13">
+                                            <p:txEl>
+                                              <p:pRg st="4" end="4"/>
+                                            </p:txEl>
+                                          </p:spTgt>
+                                        </p:tgtEl>
+                                      </p:cBhvr>
+                                    </p:animEffect>
+                                  </p:childTnLst>
+                                </p:cTn>
+                              </p:par>
+                              <p:par>
+                                <p:cTn id="48" presetID="12" presetClass="entr" presetSubtype="1" fill="hold" grpId="0" nodeType="withEffect">
+                                  <p:stCondLst>
+                                    <p:cond delay="0"/>
+                                  </p:stCondLst>
+                                  <p:childTnLst>
+                                    <p:set>
+                                      <p:cBhvr>
+                                        <p:cTn id="49" dur="1" fill="hold">
+                                          <p:stCondLst>
+                                            <p:cond delay="0"/>
+                                          </p:stCondLst>
+                                        </p:cTn>
+                                        <p:tgtEl>
+                                          <p:spTgt spid="16"/>
+                                        </p:tgtEl>
+                                        <p:attrNameLst>
+                                          <p:attrName>style.visibility</p:attrName>
+                                        </p:attrNameLst>
+                                      </p:cBhvr>
+                                      <p:to>
+                                        <p:strVal val="visible"/>
+                                      </p:to>
+                                    </p:set>
+                                    <p:anim calcmode="lin" valueType="num">
+                                      <p:cBhvr additive="base">
+                                        <p:cTn id="50" dur="500"/>
+                                        <p:tgtEl>
+                                          <p:spTgt spid="16"/>
+                                        </p:tgtEl>
+                                        <p:attrNameLst>
+                                          <p:attrName>ppt_y</p:attrName>
+                                        </p:attrNameLst>
+                                      </p:cBhvr>
+                                      <p:tavLst>
+                                        <p:tav tm="0">
+                                          <p:val>
+                                            <p:strVal val="#ppt_y-#ppt_h*1.125000"/>
+                                          </p:val>
+                                        </p:tav>
+                                        <p:tav tm="100000">
+                                          <p:val>
+                                            <p:strVal val="#ppt_y"/>
+                                          </p:val>
+                                        </p:tav>
+                                      </p:tavLst>
+                                    </p:anim>
+                                    <p:animEffect transition="in" filter="wipe(down)">
+                                      <p:cBhvr>
+                                        <p:cTn id="51" dur="500"/>
+                                        <p:tgtEl>
+                                          <p:spTgt spid="16"/>
+                                        </p:tgtEl>
+                                      </p:cBhvr>
+                                    </p:animEffect>
+                                  </p:childTnLst>
+                                </p:cTn>
+                              </p:par>
+                            </p:childTnLst>
+                          </p:cTn>
+                        </p:par>
+                      </p:childTnLst>
+                    </p:cTn>
+                  </p:par>
+                  <p:par>
+                    <p:cTn id="52" fill="hold">
+                      <p:stCondLst>
+                        <p:cond delay="indefinite"/>
+                      </p:stCondLst>
+                      <p:childTnLst>
+                        <p:par>
+                          <p:cTn id="53" fill="hold">
+                            <p:stCondLst>
+                              <p:cond delay="0"/>
+                            </p:stCondLst>
+                            <p:childTnLst>
+                              <p:par>
+                                <p:cTn id="54" presetID="12" presetClass="entr" presetSubtype="1" fill="hold" grpId="0" nodeType="clickEffect">
+                                  <p:stCondLst>
+                                    <p:cond delay="0"/>
+                                  </p:stCondLst>
+                                  <p:childTnLst>
+                                    <p:set>
+                                      <p:cBhvr>
+                                        <p:cTn id="55" dur="1" fill="hold">
+                                          <p:stCondLst>
+                                            <p:cond delay="0"/>
+                                          </p:stCondLst>
+                                        </p:cTn>
+                                        <p:tgtEl>
+                                          <p:spTgt spid="9"/>
+                                        </p:tgtEl>
+                                        <p:attrNameLst>
+                                          <p:attrName>style.visibility</p:attrName>
+                                        </p:attrNameLst>
+                                      </p:cBhvr>
+                                      <p:to>
+                                        <p:strVal val="visible"/>
+                                      </p:to>
+                                    </p:set>
+                                    <p:anim calcmode="lin" valueType="num">
+                                      <p:cBhvr additive="base">
+                                        <p:cTn id="56" dur="500"/>
+                                        <p:tgtEl>
+                                          <p:spTgt spid="9"/>
+                                        </p:tgtEl>
+                                        <p:attrNameLst>
+                                          <p:attrName>ppt_y</p:attrName>
+                                        </p:attrNameLst>
+                                      </p:cBhvr>
+                                      <p:tavLst>
+                                        <p:tav tm="0">
+                                          <p:val>
+                                            <p:strVal val="#ppt_y-#ppt_h*1.125000"/>
+                                          </p:val>
+                                        </p:tav>
+                                        <p:tav tm="100000">
+                                          <p:val>
+                                            <p:strVal val="#ppt_y"/>
+                                          </p:val>
+                                        </p:tav>
+                                      </p:tavLst>
+                                    </p:anim>
+                                    <p:animEffect transition="in" filter="wipe(down)">
+                                      <p:cBhvr>
+                                        <p:cTn id="57" dur="500"/>
+                                        <p:tgtEl>
+                                          <p:spTgt spid="9"/>
+                                        </p:tgtEl>
+                                      </p:cBhvr>
+                                    </p:animEffect>
+                                  </p:childTnLst>
+                                </p:cTn>
+                              </p:par>
+                              <p:par>
+                                <p:cTn id="58" presetID="12" presetClass="entr" presetSubtype="8" fill="hold" nodeType="withEffect">
+                                  <p:stCondLst>
+                                    <p:cond delay="0"/>
+                                  </p:stCondLst>
+                                  <p:childTnLst>
+                                    <p:set>
+                                      <p:cBhvr>
+                                        <p:cTn id="59" dur="1" fill="hold">
+                                          <p:stCondLst>
+                                            <p:cond delay="0"/>
+                                          </p:stCondLst>
+                                        </p:cTn>
+                                        <p:tgtEl>
+                                          <p:spTgt spid="13">
+                                            <p:txEl>
+                                              <p:pRg st="5" end="5"/>
+                                            </p:txEl>
+                                          </p:spTgt>
+                                        </p:tgtEl>
+                                        <p:attrNameLst>
+                                          <p:attrName>style.visibility</p:attrName>
+                                        </p:attrNameLst>
+                                      </p:cBhvr>
+                                      <p:to>
+                                        <p:strVal val="visible"/>
+                                      </p:to>
+                                    </p:set>
+                                    <p:anim calcmode="lin" valueType="num">
+                                      <p:cBhvr additive="base">
                                         <p:cTn id="60" dur="500"/>
                                         <p:tgtEl>
                                           <p:spTgt spid="13">
                                             <p:txEl>
-                                              <p:pRg st="4" end="4"/>
+                                              <p:pRg st="5" end="5"/>
+                                            </p:txEl>
+                                          </p:spTgt>
+                                        </p:tgtEl>
+                                        <p:attrNameLst>
+                                          <p:attrName>ppt_x</p:attrName>
+                                        </p:attrNameLst>
+                                      </p:cBhvr>
+                                      <p:tavLst>
+                                        <p:tav tm="0">
+                                          <p:val>
+                                            <p:strVal val="#ppt_x-#ppt_w*1.125000"/>
+                                          </p:val>
+                                        </p:tav>
+                                        <p:tav tm="100000">
+                                          <p:val>
+                                            <p:strVal val="#ppt_x"/>
+                                          </p:val>
+                                        </p:tav>
+                                      </p:tavLst>
+                                    </p:anim>
+                                    <p:animEffect transition="in" filter="wipe(right)">
+                                      <p:cBhvr>
+                                        <p:cTn id="61" dur="500"/>
+                                        <p:tgtEl>
+                                          <p:spTgt spid="13">
+                                            <p:txEl>
+                                              <p:pRg st="5" end="5"/>
+                                            </p:txEl>
+                                          </p:spTgt>
+                                        </p:tgtEl>
+                                      </p:cBhvr>
+                                    </p:animEffect>
+                                  </p:childTnLst>
+                                </p:cTn>
+                              </p:par>
+                            </p:childTnLst>
+                          </p:cTn>
+                        </p:par>
+                      </p:childTnLst>
+                    </p:cTn>
+                  </p:par>
+                  <p:par>
+                    <p:cTn id="62" fill="hold">
+                      <p:stCondLst>
+                        <p:cond delay="indefinite"/>
+                      </p:stCondLst>
+                      <p:childTnLst>
+                        <p:par>
+                          <p:cTn id="63" fill="hold">
+                            <p:stCondLst>
+                              <p:cond delay="0"/>
+                            </p:stCondLst>
+                            <p:childTnLst>
+                              <p:par>
+                                <p:cTn id="64" presetID="12" presetClass="entr" presetSubtype="1" fill="hold" grpId="0" nodeType="clickEffect">
+                                  <p:stCondLst>
+                                    <p:cond delay="0"/>
+                                  </p:stCondLst>
+                                  <p:childTnLst>
+                                    <p:set>
+                                      <p:cBhvr>
+                                        <p:cTn id="65" dur="1" fill="hold">
+                                          <p:stCondLst>
+                                            <p:cond delay="0"/>
+                                          </p:stCondLst>
+                                        </p:cTn>
+                                        <p:tgtEl>
+                                          <p:spTgt spid="11"/>
+                                        </p:tgtEl>
+                                        <p:attrNameLst>
+                                          <p:attrName>style.visibility</p:attrName>
+                                        </p:attrNameLst>
+                                      </p:cBhvr>
+                                      <p:to>
+                                        <p:strVal val="visible"/>
+                                      </p:to>
+                                    </p:set>
+                                    <p:anim calcmode="lin" valueType="num">
+                                      <p:cBhvr additive="base">
+                                        <p:cTn id="66" dur="500"/>
+                                        <p:tgtEl>
+                                          <p:spTgt spid="11"/>
+                                        </p:tgtEl>
+                                        <p:attrNameLst>
+                                          <p:attrName>ppt_y</p:attrName>
+                                        </p:attrNameLst>
+                                      </p:cBhvr>
+                                      <p:tavLst>
+                                        <p:tav tm="0">
+                                          <p:val>
+                                            <p:strVal val="#ppt_y-#ppt_h*1.125000"/>
+                                          </p:val>
+                                        </p:tav>
+                                        <p:tav tm="100000">
+                                          <p:val>
+                                            <p:strVal val="#ppt_y"/>
+                                          </p:val>
+                                        </p:tav>
+                                      </p:tavLst>
+                                    </p:anim>
+                                    <p:animEffect transition="in" filter="wipe(down)">
+                                      <p:cBhvr>
+                                        <p:cTn id="67" dur="500"/>
+                                        <p:tgtEl>
+                                          <p:spTgt spid="11"/>
+                                        </p:tgtEl>
+                                      </p:cBhvr>
+                                    </p:animEffect>
+                                  </p:childTnLst>
+                                </p:cTn>
+                              </p:par>
+                              <p:par>
+                                <p:cTn id="68" presetID="12" presetClass="entr" presetSubtype="8" fill="hold" nodeType="withEffect">
+                                  <p:stCondLst>
+                                    <p:cond delay="0"/>
+                                  </p:stCondLst>
+                                  <p:childTnLst>
+                                    <p:set>
+                                      <p:cBhvr>
+                                        <p:cTn id="69" dur="1" fill="hold">
+                                          <p:stCondLst>
+                                            <p:cond delay="0"/>
+                                          </p:stCondLst>
+                                        </p:cTn>
+                                        <p:tgtEl>
+                                          <p:spTgt spid="13">
+                                            <p:txEl>
+                                              <p:pRg st="6" end="6"/>
+                                            </p:txEl>
+                                          </p:spTgt>
+                                        </p:tgtEl>
+                                        <p:attrNameLst>
+                                          <p:attrName>style.visibility</p:attrName>
+                                        </p:attrNameLst>
+                                      </p:cBhvr>
+                                      <p:to>
+                                        <p:strVal val="visible"/>
+                                      </p:to>
+                                    </p:set>
+                                    <p:anim calcmode="lin" valueType="num">
+                                      <p:cBhvr additive="base">
+                                        <p:cTn id="70" dur="500"/>
+                                        <p:tgtEl>
+                                          <p:spTgt spid="13">
+                                            <p:txEl>
+                                              <p:pRg st="6" end="6"/>
+                                            </p:txEl>
+                                          </p:spTgt>
+                                        </p:tgtEl>
+                                        <p:attrNameLst>
+                                          <p:attrName>ppt_x</p:attrName>
+                                        </p:attrNameLst>
+                                      </p:cBhvr>
+                                      <p:tavLst>
+                                        <p:tav tm="0">
+                                          <p:val>
+                                            <p:strVal val="#ppt_x-#ppt_w*1.125000"/>
+                                          </p:val>
+                                        </p:tav>
+                                        <p:tav tm="100000">
+                                          <p:val>
+                                            <p:strVal val="#ppt_x"/>
+                                          </p:val>
+                                        </p:tav>
+                                      </p:tavLst>
+                                    </p:anim>
+                                    <p:animEffect transition="in" filter="wipe(right)">
+                                      <p:cBhvr>
+                                        <p:cTn id="71" dur="500"/>
+                                        <p:tgtEl>
+                                          <p:spTgt spid="13">
+                                            <p:txEl>
+                                              <p:pRg st="6" end="6"/>
                                             </p:txEl>
                                           </p:spTgt>
                                         </p:tgtEl>
@@ -5583,8 +6162,8 @@
       <p:bldP spid="11" grpId="0" animBg="1"/>
       <p:bldP spid="14" grpId="0" animBg="1"/>
       <p:bldP spid="10" grpId="0" animBg="1"/>
+      <p:bldP spid="16" grpId="0" animBg="1"/>
       <p:bldP spid="17" grpId="0" animBg="1"/>
-      <p:bldP spid="16" grpId="0" animBg="1"/>
     </p:bldLst>
   </p:timing>
 </p:sld>
@@ -5643,6 +6222,9 @@
             <a:avLst/>
           </a:prstGeom>
           <a:noFill/>
+          <a:ln>
+            <a:noFill/>
+          </a:ln>
           <a:extLst>
             <a:ext uri="{909E8E84-426E-40DD-AFC4-6F175D3DCCD1}">
               <a14:hiddenFill xmlns:a14="http://schemas.microsoft.com/office/drawing/2010/main">
@@ -5693,6 +6275,540 @@
             </a:r>
           </a:p>
         </p:txBody>
+      </p:sp>
+      <p:sp>
+        <p:nvSpPr>
+          <p:cNvPr id="3" name="Rectangle 2">
+            <a:extLst>
+              <a:ext uri="{FF2B5EF4-FFF2-40B4-BE49-F238E27FC236}">
+                <a16:creationId xmlns:a16="http://schemas.microsoft.com/office/drawing/2014/main" id="{5EB12F5E-3A14-948D-0FAF-D209E5FCE85C}"/>
+              </a:ext>
+            </a:extLst>
+          </p:cNvPr>
+          <p:cNvSpPr/>
+          <p:nvPr/>
+        </p:nvSpPr>
+        <p:spPr>
+          <a:xfrm>
+            <a:off x="192629" y="844629"/>
+            <a:ext cx="882435" cy="2081414"/>
+          </a:xfrm>
+          <a:prstGeom prst="rect">
+            <a:avLst/>
+          </a:prstGeom>
+        </p:spPr>
+        <p:style>
+          <a:lnRef idx="0">
+            <a:schemeClr val="dk1">
+              <a:alpha val="0"/>
+              <a:hueOff val="0"/>
+              <a:satOff val="0"/>
+              <a:lumOff val="0"/>
+              <a:alphaOff val="0"/>
+            </a:schemeClr>
+          </a:lnRef>
+          <a:fillRef idx="0">
+            <a:schemeClr val="lt1">
+              <a:alpha val="0"/>
+              <a:hueOff val="0"/>
+              <a:satOff val="0"/>
+              <a:lumOff val="0"/>
+              <a:alphaOff val="0"/>
+            </a:schemeClr>
+          </a:fillRef>
+          <a:effectRef idx="0">
+            <a:schemeClr val="lt1">
+              <a:alpha val="0"/>
+              <a:hueOff val="0"/>
+              <a:satOff val="0"/>
+              <a:lumOff val="0"/>
+              <a:alphaOff val="0"/>
+            </a:schemeClr>
+          </a:effectRef>
+          <a:fontRef idx="minor">
+            <a:schemeClr val="tx1">
+              <a:hueOff val="0"/>
+              <a:satOff val="0"/>
+              <a:lumOff val="0"/>
+              <a:alphaOff val="0"/>
+            </a:schemeClr>
+          </a:fontRef>
+        </p:style>
+      </p:sp>
+      <p:sp>
+        <p:nvSpPr>
+          <p:cNvPr id="7" name="Rectangle 6">
+            <a:extLst>
+              <a:ext uri="{FF2B5EF4-FFF2-40B4-BE49-F238E27FC236}">
+                <a16:creationId xmlns:a16="http://schemas.microsoft.com/office/drawing/2014/main" id="{D8529B26-DB5D-1721-E414-CB08421D59B8}"/>
+              </a:ext>
+            </a:extLst>
+          </p:cNvPr>
+          <p:cNvSpPr/>
+          <p:nvPr/>
+        </p:nvSpPr>
+        <p:spPr>
+          <a:xfrm>
+            <a:off x="1178731" y="3931957"/>
+            <a:ext cx="513555" cy="2081414"/>
+          </a:xfrm>
+          <a:prstGeom prst="rect">
+            <a:avLst/>
+          </a:prstGeom>
+        </p:spPr>
+        <p:style>
+          <a:lnRef idx="0">
+            <a:schemeClr val="dk1">
+              <a:alpha val="0"/>
+              <a:hueOff val="0"/>
+              <a:satOff val="0"/>
+              <a:lumOff val="0"/>
+              <a:alphaOff val="0"/>
+            </a:schemeClr>
+          </a:lnRef>
+          <a:fillRef idx="0">
+            <a:schemeClr val="lt1">
+              <a:alpha val="0"/>
+              <a:hueOff val="0"/>
+              <a:satOff val="0"/>
+              <a:lumOff val="0"/>
+              <a:alphaOff val="0"/>
+            </a:schemeClr>
+          </a:fillRef>
+          <a:effectRef idx="0">
+            <a:schemeClr val="lt1">
+              <a:alpha val="0"/>
+              <a:hueOff val="0"/>
+              <a:satOff val="0"/>
+              <a:lumOff val="0"/>
+              <a:alphaOff val="0"/>
+            </a:schemeClr>
+          </a:effectRef>
+          <a:fontRef idx="minor">
+            <a:schemeClr val="tx1">
+              <a:hueOff val="0"/>
+              <a:satOff val="0"/>
+              <a:lumOff val="0"/>
+              <a:alphaOff val="0"/>
+            </a:schemeClr>
+          </a:fontRef>
+        </p:style>
+      </p:sp>
+      <p:sp>
+        <p:nvSpPr>
+          <p:cNvPr id="10" name="Rectangle 9">
+            <a:extLst>
+              <a:ext uri="{FF2B5EF4-FFF2-40B4-BE49-F238E27FC236}">
+                <a16:creationId xmlns:a16="http://schemas.microsoft.com/office/drawing/2014/main" id="{8CF0440F-614D-D3FB-AFEC-DD38A4E0E3F6}"/>
+              </a:ext>
+            </a:extLst>
+          </p:cNvPr>
+          <p:cNvSpPr/>
+          <p:nvPr/>
+        </p:nvSpPr>
+        <p:spPr>
+          <a:xfrm>
+            <a:off x="1681237" y="1322530"/>
+            <a:ext cx="887671" cy="605156"/>
+          </a:xfrm>
+          <a:prstGeom prst="rect">
+            <a:avLst/>
+          </a:prstGeom>
+          <a:solidFill>
+            <a:schemeClr val="bg1"/>
+          </a:solidFill>
+        </p:spPr>
+        <p:style>
+          <a:lnRef idx="0">
+            <a:schemeClr val="dk1">
+              <a:alpha val="0"/>
+              <a:hueOff val="0"/>
+              <a:satOff val="0"/>
+              <a:lumOff val="0"/>
+              <a:alphaOff val="0"/>
+            </a:schemeClr>
+          </a:lnRef>
+          <a:fillRef idx="0">
+            <a:schemeClr val="lt1">
+              <a:alpha val="0"/>
+              <a:hueOff val="0"/>
+              <a:satOff val="0"/>
+              <a:lumOff val="0"/>
+              <a:alphaOff val="0"/>
+            </a:schemeClr>
+          </a:fillRef>
+          <a:effectRef idx="0">
+            <a:schemeClr val="lt1">
+              <a:alpha val="0"/>
+              <a:hueOff val="0"/>
+              <a:satOff val="0"/>
+              <a:lumOff val="0"/>
+              <a:alphaOff val="0"/>
+            </a:schemeClr>
+          </a:effectRef>
+          <a:fontRef idx="minor">
+            <a:schemeClr val="tx1">
+              <a:hueOff val="0"/>
+              <a:satOff val="0"/>
+              <a:lumOff val="0"/>
+              <a:alphaOff val="0"/>
+            </a:schemeClr>
+          </a:fontRef>
+        </p:style>
+      </p:sp>
+      <p:sp>
+        <p:nvSpPr>
+          <p:cNvPr id="13" name="Rectangle 12">
+            <a:extLst>
+              <a:ext uri="{FF2B5EF4-FFF2-40B4-BE49-F238E27FC236}">
+                <a16:creationId xmlns:a16="http://schemas.microsoft.com/office/drawing/2014/main" id="{4FFD54A4-FB92-B3AF-FAEB-A8DDFFEED2CE}"/>
+              </a:ext>
+            </a:extLst>
+          </p:cNvPr>
+          <p:cNvSpPr/>
+          <p:nvPr/>
+        </p:nvSpPr>
+        <p:spPr>
+          <a:xfrm>
+            <a:off x="2669453" y="3931957"/>
+            <a:ext cx="540784" cy="2081414"/>
+          </a:xfrm>
+          <a:prstGeom prst="rect">
+            <a:avLst/>
+          </a:prstGeom>
+        </p:spPr>
+        <p:style>
+          <a:lnRef idx="0">
+            <a:schemeClr val="dk1">
+              <a:alpha val="0"/>
+              <a:hueOff val="0"/>
+              <a:satOff val="0"/>
+              <a:lumOff val="0"/>
+              <a:alphaOff val="0"/>
+            </a:schemeClr>
+          </a:lnRef>
+          <a:fillRef idx="0">
+            <a:schemeClr val="lt1">
+              <a:alpha val="0"/>
+              <a:hueOff val="0"/>
+              <a:satOff val="0"/>
+              <a:lumOff val="0"/>
+              <a:alphaOff val="0"/>
+            </a:schemeClr>
+          </a:fillRef>
+          <a:effectRef idx="0">
+            <a:schemeClr val="lt1">
+              <a:alpha val="0"/>
+              <a:hueOff val="0"/>
+              <a:satOff val="0"/>
+              <a:lumOff val="0"/>
+              <a:alphaOff val="0"/>
+            </a:schemeClr>
+          </a:effectRef>
+          <a:fontRef idx="minor">
+            <a:schemeClr val="tx1">
+              <a:hueOff val="0"/>
+              <a:satOff val="0"/>
+              <a:lumOff val="0"/>
+              <a:alphaOff val="0"/>
+            </a:schemeClr>
+          </a:fontRef>
+        </p:style>
+      </p:sp>
+      <p:sp>
+        <p:nvSpPr>
+          <p:cNvPr id="16" name="Rectangle 15">
+            <a:extLst>
+              <a:ext uri="{FF2B5EF4-FFF2-40B4-BE49-F238E27FC236}">
+                <a16:creationId xmlns:a16="http://schemas.microsoft.com/office/drawing/2014/main" id="{8C21860A-1792-6C5A-1DF9-0C6B6E3DA4FB}"/>
+              </a:ext>
+            </a:extLst>
+          </p:cNvPr>
+          <p:cNvSpPr/>
+          <p:nvPr/>
+        </p:nvSpPr>
+        <p:spPr>
+          <a:xfrm>
+            <a:off x="4157203" y="2535559"/>
+            <a:ext cx="829593" cy="1517530"/>
+          </a:xfrm>
+          <a:prstGeom prst="rect">
+            <a:avLst/>
+          </a:prstGeom>
+        </p:spPr>
+        <p:style>
+          <a:lnRef idx="0">
+            <a:schemeClr val="dk1">
+              <a:alpha val="0"/>
+              <a:hueOff val="0"/>
+              <a:satOff val="0"/>
+              <a:lumOff val="0"/>
+              <a:alphaOff val="0"/>
+            </a:schemeClr>
+          </a:lnRef>
+          <a:fillRef idx="0">
+            <a:schemeClr val="lt1">
+              <a:alpha val="0"/>
+              <a:hueOff val="0"/>
+              <a:satOff val="0"/>
+              <a:lumOff val="0"/>
+              <a:alphaOff val="0"/>
+            </a:schemeClr>
+          </a:fillRef>
+          <a:effectRef idx="0">
+            <a:schemeClr val="lt1">
+              <a:alpha val="0"/>
+              <a:hueOff val="0"/>
+              <a:satOff val="0"/>
+              <a:lumOff val="0"/>
+              <a:alphaOff val="0"/>
+            </a:schemeClr>
+          </a:effectRef>
+          <a:fontRef idx="minor">
+            <a:schemeClr val="tx1">
+              <a:hueOff val="0"/>
+              <a:satOff val="0"/>
+              <a:lumOff val="0"/>
+              <a:alphaOff val="0"/>
+            </a:schemeClr>
+          </a:fontRef>
+        </p:style>
+      </p:sp>
+      <p:sp>
+        <p:nvSpPr>
+          <p:cNvPr id="19" name="Rectangle 18">
+            <a:extLst>
+              <a:ext uri="{FF2B5EF4-FFF2-40B4-BE49-F238E27FC236}">
+                <a16:creationId xmlns:a16="http://schemas.microsoft.com/office/drawing/2014/main" id="{8663576F-3D1F-CD84-828A-16FC6B7BC41C}"/>
+              </a:ext>
+            </a:extLst>
+          </p:cNvPr>
+          <p:cNvSpPr/>
+          <p:nvPr/>
+        </p:nvSpPr>
+        <p:spPr>
+          <a:xfrm>
+            <a:off x="3956565" y="4659545"/>
+            <a:ext cx="836013" cy="2081414"/>
+          </a:xfrm>
+          <a:prstGeom prst="rect">
+            <a:avLst/>
+          </a:prstGeom>
+        </p:spPr>
+        <p:style>
+          <a:lnRef idx="0">
+            <a:schemeClr val="dk1">
+              <a:alpha val="0"/>
+              <a:hueOff val="0"/>
+              <a:satOff val="0"/>
+              <a:lumOff val="0"/>
+              <a:alphaOff val="0"/>
+            </a:schemeClr>
+          </a:lnRef>
+          <a:fillRef idx="0">
+            <a:schemeClr val="lt1">
+              <a:alpha val="0"/>
+              <a:hueOff val="0"/>
+              <a:satOff val="0"/>
+              <a:lumOff val="0"/>
+              <a:alphaOff val="0"/>
+            </a:schemeClr>
+          </a:fillRef>
+          <a:effectRef idx="0">
+            <a:schemeClr val="lt1">
+              <a:alpha val="0"/>
+              <a:hueOff val="0"/>
+              <a:satOff val="0"/>
+              <a:lumOff val="0"/>
+              <a:alphaOff val="0"/>
+            </a:schemeClr>
+          </a:effectRef>
+          <a:fontRef idx="minor">
+            <a:schemeClr val="tx1">
+              <a:hueOff val="0"/>
+              <a:satOff val="0"/>
+              <a:lumOff val="0"/>
+              <a:alphaOff val="0"/>
+            </a:schemeClr>
+          </a:fontRef>
+        </p:style>
+      </p:sp>
+      <p:sp>
+        <p:nvSpPr>
+          <p:cNvPr id="25" name="Rectangle 24">
+            <a:extLst>
+              <a:ext uri="{FF2B5EF4-FFF2-40B4-BE49-F238E27FC236}">
+                <a16:creationId xmlns:a16="http://schemas.microsoft.com/office/drawing/2014/main" id="{E9C5BCA2-37A7-7DA7-BA3A-1FFB04FDF30C}"/>
+              </a:ext>
+            </a:extLst>
+          </p:cNvPr>
+          <p:cNvSpPr/>
+          <p:nvPr/>
+        </p:nvSpPr>
+        <p:spPr>
+          <a:xfrm>
+            <a:off x="5849489" y="4966701"/>
+            <a:ext cx="594959" cy="1523854"/>
+          </a:xfrm>
+          <a:prstGeom prst="rect">
+            <a:avLst/>
+          </a:prstGeom>
+        </p:spPr>
+        <p:style>
+          <a:lnRef idx="0">
+            <a:schemeClr val="dk1">
+              <a:alpha val="0"/>
+              <a:hueOff val="0"/>
+              <a:satOff val="0"/>
+              <a:lumOff val="0"/>
+              <a:alphaOff val="0"/>
+            </a:schemeClr>
+          </a:lnRef>
+          <a:fillRef idx="0">
+            <a:schemeClr val="lt1">
+              <a:alpha val="0"/>
+              <a:hueOff val="0"/>
+              <a:satOff val="0"/>
+              <a:lumOff val="0"/>
+              <a:alphaOff val="0"/>
+            </a:schemeClr>
+          </a:fillRef>
+          <a:effectRef idx="0">
+            <a:schemeClr val="lt1">
+              <a:alpha val="0"/>
+              <a:hueOff val="0"/>
+              <a:satOff val="0"/>
+              <a:lumOff val="0"/>
+              <a:alphaOff val="0"/>
+            </a:schemeClr>
+          </a:effectRef>
+          <a:fontRef idx="minor">
+            <a:schemeClr val="tx1">
+              <a:hueOff val="0"/>
+              <a:satOff val="0"/>
+              <a:lumOff val="0"/>
+              <a:alphaOff val="0"/>
+            </a:schemeClr>
+          </a:fontRef>
+        </p:style>
+      </p:sp>
+      <p:sp>
+        <p:nvSpPr>
+          <p:cNvPr id="31" name="Rectangle 30">
+            <a:extLst>
+              <a:ext uri="{FF2B5EF4-FFF2-40B4-BE49-F238E27FC236}">
+                <a16:creationId xmlns:a16="http://schemas.microsoft.com/office/drawing/2014/main" id="{AF5C2F6D-2653-C4A6-06CB-BE04722832CC}"/>
+              </a:ext>
+            </a:extLst>
+          </p:cNvPr>
+          <p:cNvSpPr/>
+          <p:nvPr/>
+        </p:nvSpPr>
+        <p:spPr>
+          <a:xfrm>
+            <a:off x="4284465" y="1543664"/>
+            <a:ext cx="572669" cy="2081414"/>
+          </a:xfrm>
+          <a:prstGeom prst="rect">
+            <a:avLst/>
+          </a:prstGeom>
+        </p:spPr>
+        <p:style>
+          <a:lnRef idx="0">
+            <a:schemeClr val="dk1">
+              <a:alpha val="0"/>
+              <a:hueOff val="0"/>
+              <a:satOff val="0"/>
+              <a:lumOff val="0"/>
+              <a:alphaOff val="0"/>
+            </a:schemeClr>
+          </a:lnRef>
+          <a:fillRef idx="0">
+            <a:schemeClr val="lt1">
+              <a:alpha val="0"/>
+              <a:hueOff val="0"/>
+              <a:satOff val="0"/>
+              <a:lumOff val="0"/>
+              <a:alphaOff val="0"/>
+            </a:schemeClr>
+          </a:fillRef>
+          <a:effectRef idx="0">
+            <a:schemeClr val="lt1">
+              <a:alpha val="0"/>
+              <a:hueOff val="0"/>
+              <a:satOff val="0"/>
+              <a:lumOff val="0"/>
+              <a:alphaOff val="0"/>
+            </a:schemeClr>
+          </a:effectRef>
+          <a:fontRef idx="minor">
+            <a:schemeClr val="tx1">
+              <a:hueOff val="0"/>
+              <a:satOff val="0"/>
+              <a:lumOff val="0"/>
+              <a:alphaOff val="0"/>
+            </a:schemeClr>
+          </a:fontRef>
+        </p:style>
+      </p:sp>
+      <p:sp>
+        <p:nvSpPr>
+          <p:cNvPr id="28" name="Rectangle 27">
+            <a:extLst>
+              <a:ext uri="{FF2B5EF4-FFF2-40B4-BE49-F238E27FC236}">
+                <a16:creationId xmlns:a16="http://schemas.microsoft.com/office/drawing/2014/main" id="{364623D6-3B23-2F38-9406-2F614755353D}"/>
+              </a:ext>
+            </a:extLst>
+          </p:cNvPr>
+          <p:cNvSpPr/>
+          <p:nvPr/>
+        </p:nvSpPr>
+        <p:spPr>
+          <a:xfrm>
+            <a:off x="4210814" y="2388293"/>
+            <a:ext cx="722372" cy="2081414"/>
+          </a:xfrm>
+          <a:prstGeom prst="rect">
+            <a:avLst/>
+          </a:prstGeom>
+        </p:spPr>
+        <p:style>
+          <a:lnRef idx="0">
+            <a:schemeClr val="dk1">
+              <a:alpha val="0"/>
+              <a:hueOff val="0"/>
+              <a:satOff val="0"/>
+              <a:lumOff val="0"/>
+              <a:alphaOff val="0"/>
+            </a:schemeClr>
+          </a:lnRef>
+          <a:fillRef idx="0">
+            <a:schemeClr val="lt1">
+              <a:alpha val="0"/>
+              <a:hueOff val="0"/>
+              <a:satOff val="0"/>
+              <a:lumOff val="0"/>
+              <a:alphaOff val="0"/>
+            </a:schemeClr>
+          </a:fillRef>
+          <a:effectRef idx="0">
+            <a:schemeClr val="lt1">
+              <a:alpha val="0"/>
+              <a:hueOff val="0"/>
+              <a:satOff val="0"/>
+              <a:lumOff val="0"/>
+              <a:alphaOff val="0"/>
+            </a:schemeClr>
+          </a:effectRef>
+          <a:fontRef idx="minor">
+            <a:schemeClr val="tx1">
+              <a:hueOff val="0"/>
+              <a:satOff val="0"/>
+              <a:lumOff val="0"/>
+              <a:alphaOff val="0"/>
+            </a:schemeClr>
+          </a:fontRef>
+        </p:style>
       </p:sp>
     </p:spTree>
     <p:extLst>
@@ -7346,14 +8462,8 @@
 </file>
 
 <file path=customXml/item1.xml><?xml version="1.0" encoding="utf-8"?>
-<p:properties xmlns:p="http://schemas.microsoft.com/office/2006/metadata/properties" xmlns:xsi="http://www.w3.org/2001/XMLSchema-instance" xmlns:pc="http://schemas.microsoft.com/office/infopath/2007/PartnerControls">
-  <documentManagement/>
-</p:properties>
-</file>
-
-<file path=customXml/item2.xml><?xml version="1.0" encoding="utf-8"?>
-<ct:contentTypeSchema xmlns:ct="http://schemas.microsoft.com/office/2006/metadata/contentType" xmlns:ma="http://schemas.microsoft.com/office/2006/metadata/properties/metaAttributes" ct:_="" ma:_="" ma:contentTypeName="Document" ma:contentTypeID="0x0101002F017C5ECD5AE84588140775F5D9B6FC" ma:contentTypeVersion="10" ma:contentTypeDescription="Create a new document." ma:contentTypeScope="" ma:versionID="3fff9ed69b78a1d1c48e3f96068d2b17">
-  <xsd:schema xmlns:xsd="http://www.w3.org/2001/XMLSchema" xmlns:xs="http://www.w3.org/2001/XMLSchema" xmlns:p="http://schemas.microsoft.com/office/2006/metadata/properties" xmlns:ns2="fee82e44-1fa4-4144-8309-00fed2bf4198" xmlns:ns3="1a61c928-f5f6-4989-bd5d-cb8872a1b06d" targetNamespace="http://schemas.microsoft.com/office/2006/metadata/properties" ma:root="true" ma:fieldsID="7b2c40b849e0c1cff02f16dd8f1be10b" ns2:_="" ns3:_="">
+<ct:contentTypeSchema xmlns:ct="http://schemas.microsoft.com/office/2006/metadata/contentType" xmlns:ma="http://schemas.microsoft.com/office/2006/metadata/properties/metaAttributes" ct:_="" ma:_="" ma:contentTypeName="Document" ma:contentTypeID="0x0101002F017C5ECD5AE84588140775F5D9B6FC" ma:contentTypeVersion="10" ma:contentTypeDescription="Create a new document." ma:contentTypeScope="" ma:versionID="1a5380cb2be4a51461126b02f947e923">
+  <xsd:schema xmlns:xsd="http://www.w3.org/2001/XMLSchema" xmlns:xs="http://www.w3.org/2001/XMLSchema" xmlns:p="http://schemas.microsoft.com/office/2006/metadata/properties" xmlns:ns2="fee82e44-1fa4-4144-8309-00fed2bf4198" xmlns:ns3="1a61c928-f5f6-4989-bd5d-cb8872a1b06d" targetNamespace="http://schemas.microsoft.com/office/2006/metadata/properties" ma:root="true" ma:fieldsID="9bf58d68fa2085cb5739c341b0c4cacb" ns2:_="" ns3:_="">
     <xsd:import namespace="fee82e44-1fa4-4144-8309-00fed2bf4198"/>
     <xsd:import namespace="1a61c928-f5f6-4989-bd5d-cb8872a1b06d"/>
     <xsd:element name="properties">
@@ -7552,6 +8662,12 @@
 </ct:contentTypeSchema>
 </file>
 
+<file path=customXml/item2.xml><?xml version="1.0" encoding="utf-8"?>
+<p:properties xmlns:p="http://schemas.microsoft.com/office/2006/metadata/properties" xmlns:xsi="http://www.w3.org/2001/XMLSchema-instance" xmlns:pc="http://schemas.microsoft.com/office/infopath/2007/PartnerControls">
+  <documentManagement/>
+</p:properties>
+</file>
+
 <file path=customXml/item3.xml><?xml version="1.0" encoding="utf-8"?>
 <?mso-contentType ?>
 <FormTemplates xmlns="http://schemas.microsoft.com/sharepoint/v3/contenttype/forms">
@@ -7562,37 +8678,37 @@
 </file>
 
 <file path=customXml/itemProps1.xml><?xml version="1.0" encoding="utf-8"?>
-<ds:datastoreItem xmlns:ds="http://schemas.openxmlformats.org/officeDocument/2006/customXml" ds:itemID="{DD870300-B03F-45F7-9154-521D8C74684E}">
+<ds:datastoreItem xmlns:ds="http://schemas.openxmlformats.org/officeDocument/2006/customXml" ds:itemID="{A0CA5D55-ED13-43AC-9719-B8C54F3EA0FA}">
   <ds:schemaRefs>
+    <ds:schemaRef ds:uri="http://schemas.microsoft.com/office/2006/metadata/contentType"/>
+    <ds:schemaRef ds:uri="http://schemas.microsoft.com/office/2006/metadata/properties/metaAttributes"/>
+    <ds:schemaRef ds:uri="http://www.w3.org/2001/XMLSchema"/>
+    <ds:schemaRef ds:uri="http://schemas.microsoft.com/office/2006/metadata/properties"/>
+    <ds:schemaRef ds:uri="fee82e44-1fa4-4144-8309-00fed2bf4198"/>
     <ds:schemaRef ds:uri="1a61c928-f5f6-4989-bd5d-cb8872a1b06d"/>
+    <ds:schemaRef ds:uri="http://schemas.microsoft.com/office/2006/documentManagement/types"/>
+    <ds:schemaRef ds:uri="http://schemas.microsoft.com/office/infopath/2007/PartnerControls"/>
     <ds:schemaRef ds:uri="http://schemas.openxmlformats.org/package/2006/metadata/core-properties"/>
-    <ds:schemaRef ds:uri="http://schemas.microsoft.com/office/2006/documentManagement/types"/>
-    <ds:schemaRef ds:uri="fee82e44-1fa4-4144-8309-00fed2bf4198"/>
     <ds:schemaRef ds:uri="http://purl.org/dc/elements/1.1/"/>
-    <ds:schemaRef ds:uri="http://www.w3.org/XML/1998/namespace"/>
     <ds:schemaRef ds:uri="http://purl.org/dc/terms/"/>
-    <ds:schemaRef ds:uri="http://schemas.microsoft.com/office/infopath/2007/PartnerControls"/>
-    <ds:schemaRef ds:uri="http://schemas.microsoft.com/office/2006/metadata/properties"/>
-    <ds:schemaRef ds:uri="http://purl.org/dc/dcmitype/"/>
+    <ds:schemaRef ds:uri="http://schemas.microsoft.com/internal/obd"/>
   </ds:schemaRefs>
 </ds:datastoreItem>
 </file>
 
 <file path=customXml/itemProps2.xml><?xml version="1.0" encoding="utf-8"?>
-<ds:datastoreItem xmlns:ds="http://schemas.openxmlformats.org/officeDocument/2006/customXml" ds:itemID="{DBB29CC1-E656-4579-9C50-89BAE49F997D}">
+<ds:datastoreItem xmlns:ds="http://schemas.openxmlformats.org/officeDocument/2006/customXml" ds:itemID="{DD870300-B03F-45F7-9154-521D8C74684E}">
   <ds:schemaRefs>
     <ds:schemaRef ds:uri="1a61c928-f5f6-4989-bd5d-cb8872a1b06d"/>
-    <ds:schemaRef ds:uri="fee82e44-1fa4-4144-8309-00fed2bf4198"/>
+    <ds:schemaRef ds:uri="http://purl.org/dc/terms/"/>
+    <ds:schemaRef ds:uri="http://purl.org/dc/dcmitype/"/>
+    <ds:schemaRef ds:uri="http://schemas.microsoft.com/office/2006/metadata/properties"/>
+    <ds:schemaRef ds:uri="http://www.w3.org/XML/1998/namespace"/>
     <ds:schemaRef ds:uri="http://purl.org/dc/elements/1.1/"/>
-    <ds:schemaRef ds:uri="http://purl.org/dc/terms/"/>
-    <ds:schemaRef ds:uri="http://schemas.microsoft.com/internal/obd"/>
     <ds:schemaRef ds:uri="http://schemas.microsoft.com/office/2006/documentManagement/types"/>
-    <ds:schemaRef ds:uri="http://schemas.microsoft.com/office/2006/metadata/contentType"/>
-    <ds:schemaRef ds:uri="http://schemas.microsoft.com/office/2006/metadata/properties"/>
-    <ds:schemaRef ds:uri="http://schemas.microsoft.com/office/2006/metadata/properties/metaAttributes"/>
     <ds:schemaRef ds:uri="http://schemas.microsoft.com/office/infopath/2007/PartnerControls"/>
     <ds:schemaRef ds:uri="http://schemas.openxmlformats.org/package/2006/metadata/core-properties"/>
-    <ds:schemaRef ds:uri="http://www.w3.org/2001/XMLSchema"/>
+    <ds:schemaRef ds:uri="fee82e44-1fa4-4144-8309-00fed2bf4198"/>
   </ds:schemaRefs>
 </ds:datastoreItem>
 </file>
